--- a/ESP32_電流偵測系統_報告.pptx
+++ b/ESP32_電流偵測系統_報告.pptx
@@ -5,21 +5,23 @@
     <p:sldMasterId id="2147483648" r:id="rId1"/>
   </p:sldMasterIdLst>
   <p:notesMasterIdLst>
-    <p:notesMasterId r:id="rId14"/>
+    <p:notesMasterId r:id="rId16"/>
   </p:notesMasterIdLst>
   <p:sldIdLst>
     <p:sldId id="256" r:id="rId2"/>
     <p:sldId id="257" r:id="rId3"/>
     <p:sldId id="258" r:id="rId4"/>
-    <p:sldId id="259" r:id="rId5"/>
-    <p:sldId id="260" r:id="rId6"/>
-    <p:sldId id="261" r:id="rId7"/>
-    <p:sldId id="266" r:id="rId8"/>
-    <p:sldId id="262" r:id="rId9"/>
-    <p:sldId id="263" r:id="rId10"/>
-    <p:sldId id="267" r:id="rId11"/>
-    <p:sldId id="264" r:id="rId12"/>
-    <p:sldId id="265" r:id="rId13"/>
+    <p:sldId id="268" r:id="rId5"/>
+    <p:sldId id="259" r:id="rId6"/>
+    <p:sldId id="269" r:id="rId7"/>
+    <p:sldId id="260" r:id="rId8"/>
+    <p:sldId id="261" r:id="rId9"/>
+    <p:sldId id="266" r:id="rId10"/>
+    <p:sldId id="262" r:id="rId11"/>
+    <p:sldId id="263" r:id="rId12"/>
+    <p:sldId id="267" r:id="rId13"/>
+    <p:sldId id="264" r:id="rId14"/>
+    <p:sldId id="265" r:id="rId15"/>
   </p:sldIdLst>
   <p:sldSz cx="9144000" cy="5143500" type="screen16x9"/>
   <p:notesSz cx="5143500" cy="9144000"/>
@@ -647,7 +649,7 @@
           <a:p>
             <a:fld id="{F7021451-1387-4CA6-816F-3879F97B5CBC}" type="slidenum">
               <a:rPr lang="en-US"/>
-              <a:t>12</a:t>
+              <a:t>14</a:t>
             </a:fld>
             <a:endParaRPr lang="en-US"/>
           </a:p>
@@ -899,7 +901,7 @@
           <a:p>
             <a:fld id="{F7021451-1387-4CA6-816F-3879F97B5CBC}" type="slidenum">
               <a:rPr lang="en-US"/>
-              <a:t>4</a:t>
+              <a:t>5</a:t>
             </a:fld>
             <a:endParaRPr lang="en-US"/>
           </a:p>
@@ -983,7 +985,7 @@
           <a:p>
             <a:fld id="{F7021451-1387-4CA6-816F-3879F97B5CBC}" type="slidenum">
               <a:rPr lang="en-US"/>
-              <a:t>5</a:t>
+              <a:t>7</a:t>
             </a:fld>
             <a:endParaRPr lang="en-US"/>
           </a:p>
@@ -1067,7 +1069,7 @@
           <a:p>
             <a:fld id="{F7021451-1387-4CA6-816F-3879F97B5CBC}" type="slidenum">
               <a:rPr lang="en-US"/>
-              <a:t>6</a:t>
+              <a:t>8</a:t>
             </a:fld>
             <a:endParaRPr lang="en-US"/>
           </a:p>
@@ -1151,7 +1153,7 @@
           <a:p>
             <a:fld id="{F7021451-1387-4CA6-816F-3879F97B5CBC}" type="slidenum">
               <a:rPr lang="en-US"/>
-              <a:t>8</a:t>
+              <a:t>10</a:t>
             </a:fld>
             <a:endParaRPr lang="en-US"/>
           </a:p>
@@ -1235,7 +1237,7 @@
           <a:p>
             <a:fld id="{F7021451-1387-4CA6-816F-3879F97B5CBC}" type="slidenum">
               <a:rPr lang="en-US"/>
-              <a:t>9</a:t>
+              <a:t>11</a:t>
             </a:fld>
             <a:endParaRPr lang="en-US"/>
           </a:p>
@@ -1319,7 +1321,7 @@
           <a:p>
             <a:fld id="{F7021451-1387-4CA6-816F-3879F97B5CBC}" type="slidenum">
               <a:rPr lang="en-US"/>
-              <a:t>11</a:t>
+              <a:t>13</a:t>
             </a:fld>
             <a:endParaRPr lang="en-US"/>
           </a:p>
@@ -2169,6 +2171,2198 @@
 
 <file path=ppt/slides/slide10.xml><?xml version="1.0" encoding="utf-8"?>
 <p:sld xmlns:a="http://schemas.openxmlformats.org/drawingml/2006/main" xmlns:r="http://schemas.openxmlformats.org/officeDocument/2006/relationships" xmlns:p="http://schemas.openxmlformats.org/presentationml/2006/main">
+  <p:cSld name="Slide 7">
+    <p:bg>
+      <p:bgPr>
+        <a:solidFill>
+          <a:srgbClr val="FFFFFF"/>
+        </a:solidFill>
+        <a:effectLst/>
+      </p:bgPr>
+    </p:bg>
+    <p:spTree>
+      <p:nvGrpSpPr>
+        <p:cNvPr id="1" name=""/>
+        <p:cNvGrpSpPr/>
+        <p:nvPr/>
+      </p:nvGrpSpPr>
+      <p:grpSpPr>
+        <a:xfrm>
+          <a:off x="0" y="0"/>
+          <a:ext cx="0" cy="0"/>
+          <a:chOff x="0" y="0"/>
+          <a:chExt cx="0" cy="0"/>
+        </a:xfrm>
+      </p:grpSpPr>
+      <p:sp>
+        <p:nvSpPr>
+          <p:cNvPr id="2" name="Shape 0"/>
+          <p:cNvSpPr/>
+          <p:nvPr/>
+        </p:nvSpPr>
+        <p:spPr>
+          <a:xfrm>
+            <a:off x="0" y="0"/>
+            <a:ext cx="9144000" cy="960120"/>
+          </a:xfrm>
+          <a:prstGeom prst="rect">
+            <a:avLst/>
+          </a:prstGeom>
+          <a:solidFill>
+            <a:srgbClr val="0D1B2A"/>
+          </a:solidFill>
+          <a:ln/>
+        </p:spPr>
+      </p:sp>
+      <p:sp>
+        <p:nvSpPr>
+          <p:cNvPr id="3" name="Text 1"/>
+          <p:cNvSpPr/>
+          <p:nvPr/>
+        </p:nvSpPr>
+        <p:spPr>
+          <a:xfrm>
+            <a:off x="457200" y="91440"/>
+            <a:ext cx="8229600" cy="777240"/>
+          </a:xfrm>
+          <a:prstGeom prst="rect">
+            <a:avLst/>
+          </a:prstGeom>
+          <a:noFill/>
+          <a:ln/>
+        </p:spPr>
+        <p:txBody>
+          <a:bodyPr wrap="square" rtlCol="0" anchor="ctr"/>
+          <a:lstStyle/>
+          <a:p>
+            <a:pPr marL="0" indent="0">
+              <a:buNone/>
+            </a:pPr>
+            <a:r>
+              <a:rPr lang="en-US" sz="2600" b="1" dirty="0">
+                <a:solidFill>
+                  <a:srgbClr val="FFFFFF"/>
+                </a:solidFill>
+                <a:latin typeface="Calibri" pitchFamily="34" charset="0"/>
+                <a:ea typeface="Calibri" pitchFamily="34" charset="-122"/>
+                <a:cs typeface="Calibri" pitchFamily="34" charset="-120"/>
+              </a:rPr>
+              <a:t>04　核心軟體演算法</a:t>
+            </a:r>
+            <a:endParaRPr lang="en-US" sz="2600" dirty="0"/>
+          </a:p>
+        </p:txBody>
+      </p:sp>
+      <p:sp>
+        <p:nvSpPr>
+          <p:cNvPr id="4" name="Shape 2"/>
+          <p:cNvSpPr/>
+          <p:nvPr/>
+        </p:nvSpPr>
+        <p:spPr>
+          <a:xfrm>
+            <a:off x="320040" y="1051560"/>
+            <a:ext cx="4023360" cy="1828800"/>
+          </a:xfrm>
+          <a:prstGeom prst="rect">
+            <a:avLst/>
+          </a:prstGeom>
+          <a:solidFill>
+            <a:srgbClr val="E8F4F8"/>
+          </a:solidFill>
+          <a:ln w="12700">
+            <a:solidFill>
+              <a:srgbClr val="00A8CC"/>
+            </a:solidFill>
+            <a:prstDash val="solid"/>
+          </a:ln>
+        </p:spPr>
+      </p:sp>
+      <p:sp>
+        <p:nvSpPr>
+          <p:cNvPr id="5" name="Shape 3"/>
+          <p:cNvSpPr/>
+          <p:nvPr/>
+        </p:nvSpPr>
+        <p:spPr>
+          <a:xfrm>
+            <a:off x="320040" y="1051560"/>
+            <a:ext cx="4023360" cy="365760"/>
+          </a:xfrm>
+          <a:prstGeom prst="rect">
+            <a:avLst/>
+          </a:prstGeom>
+          <a:solidFill>
+            <a:srgbClr val="00A8CC"/>
+          </a:solidFill>
+          <a:ln/>
+        </p:spPr>
+      </p:sp>
+      <p:sp>
+        <p:nvSpPr>
+          <p:cNvPr id="6" name="Text 4"/>
+          <p:cNvSpPr/>
+          <p:nvPr/>
+        </p:nvSpPr>
+        <p:spPr>
+          <a:xfrm>
+            <a:off x="365760" y="1051560"/>
+            <a:ext cx="3931920" cy="365760"/>
+          </a:xfrm>
+          <a:prstGeom prst="rect">
+            <a:avLst/>
+          </a:prstGeom>
+          <a:noFill/>
+          <a:ln/>
+        </p:spPr>
+        <p:txBody>
+          <a:bodyPr wrap="square" rtlCol="0" anchor="ctr"/>
+          <a:lstStyle/>
+          <a:p>
+            <a:pPr marL="0" indent="0">
+              <a:buNone/>
+            </a:pPr>
+            <a:r>
+              <a:rPr lang="en-US" sz="1200" b="1" dirty="0">
+                <a:solidFill>
+                  <a:srgbClr val="FFFFFF"/>
+                </a:solidFill>
+                <a:latin typeface="Calibri" pitchFamily="34" charset="0"/>
+                <a:ea typeface="Calibri" pitchFamily="34" charset="-122"/>
+                <a:cs typeface="Calibri" pitchFamily="34" charset="-120"/>
+              </a:rPr>
+              <a:t>數位高通濾波器（Digital HPF）</a:t>
+            </a:r>
+            <a:endParaRPr lang="en-US" sz="1200" dirty="0"/>
+          </a:p>
+        </p:txBody>
+      </p:sp>
+      <p:sp>
+        <p:nvSpPr>
+          <p:cNvPr id="7" name="Text 5"/>
+          <p:cNvSpPr/>
+          <p:nvPr/>
+        </p:nvSpPr>
+        <p:spPr>
+          <a:xfrm>
+            <a:off x="411480" y="1508760"/>
+            <a:ext cx="3840480" cy="457200"/>
+          </a:xfrm>
+          <a:prstGeom prst="rect">
+            <a:avLst/>
+          </a:prstGeom>
+          <a:noFill/>
+          <a:ln/>
+        </p:spPr>
+        <p:txBody>
+          <a:bodyPr wrap="square" rtlCol="0" anchor="ctr"/>
+          <a:lstStyle/>
+          <a:p>
+            <a:pPr marL="0" indent="0">
+              <a:buNone/>
+            </a:pPr>
+            <a:r>
+              <a:rPr lang="en-US" sz="1300" b="1" dirty="0">
+                <a:solidFill>
+                  <a:srgbClr val="0D1B2A"/>
+                </a:solidFill>
+                <a:latin typeface="Consolas" pitchFamily="34" charset="0"/>
+                <a:ea typeface="Consolas" pitchFamily="34" charset="-122"/>
+                <a:cs typeface="Consolas" pitchFamily="34" charset="-120"/>
+              </a:rPr>
+              <a:t>y[n] = 0.9961 × (y[n−1] + x[n] − x[n−1])</a:t>
+            </a:r>
+            <a:endParaRPr lang="en-US" sz="1300" dirty="0"/>
+          </a:p>
+        </p:txBody>
+      </p:sp>
+      <p:sp>
+        <p:nvSpPr>
+          <p:cNvPr id="8" name="Text 6"/>
+          <p:cNvSpPr/>
+          <p:nvPr/>
+        </p:nvSpPr>
+        <p:spPr>
+          <a:xfrm>
+            <a:off x="411480" y="2011680"/>
+            <a:ext cx="3840480" cy="777240"/>
+          </a:xfrm>
+          <a:prstGeom prst="rect">
+            <a:avLst/>
+          </a:prstGeom>
+          <a:noFill/>
+          <a:ln/>
+        </p:spPr>
+        <p:txBody>
+          <a:bodyPr wrap="square" rtlCol="0" anchor="ctr"/>
+          <a:lstStyle/>
+          <a:p>
+            <a:pPr marL="0" indent="0">
+              <a:buNone/>
+            </a:pPr>
+            <a:r>
+              <a:rPr lang="en-US" sz="1100" b="1" dirty="0">
+                <a:solidFill>
+                  <a:srgbClr val="0D1B2A"/>
+                </a:solidFill>
+                <a:latin typeface="Calibri" pitchFamily="34" charset="0"/>
+                <a:ea typeface="Calibri" pitchFamily="34" charset="-122"/>
+                <a:cs typeface="Calibri" pitchFamily="34" charset="-120"/>
+              </a:rPr>
+              <a:t>x[n]</a:t>
+            </a:r>
+            <a:r>
+              <a:rPr lang="en-US" sz="1100" dirty="0">
+                <a:solidFill>
+                  <a:srgbClr val="0D1B2A"/>
+                </a:solidFill>
+                <a:latin typeface="Calibri" pitchFamily="34" charset="0"/>
+                <a:ea typeface="Calibri" pitchFamily="34" charset="-122"/>
+                <a:cs typeface="Calibri" pitchFamily="34" charset="-120"/>
+              </a:rPr>
+              <a:t>：當前 ADC 採樣毫伏值
+</a:t>
+            </a:r>
+            <a:r>
+              <a:rPr lang="en-US" sz="1100" b="1" dirty="0">
+                <a:solidFill>
+                  <a:srgbClr val="0D1B2A"/>
+                </a:solidFill>
+                <a:latin typeface="Calibri" pitchFamily="34" charset="0"/>
+                <a:ea typeface="Calibri" pitchFamily="34" charset="-122"/>
+                <a:cs typeface="Calibri" pitchFamily="34" charset="-120"/>
+              </a:rPr>
+              <a:t>y[n]</a:t>
+            </a:r>
+            <a:r>
+              <a:rPr lang="en-US" sz="1100" dirty="0">
+                <a:solidFill>
+                  <a:srgbClr val="0D1B2A"/>
+                </a:solidFill>
+                <a:latin typeface="Calibri" pitchFamily="34" charset="0"/>
+                <a:ea typeface="Calibri" pitchFamily="34" charset="-122"/>
+                <a:cs typeface="Calibri" pitchFamily="34" charset="-120"/>
+              </a:rPr>
+              <a:t>：濾波後 AC 成分
+</a:t>
+            </a:r>
+            <a:r>
+              <a:rPr lang="en-US" sz="1100" b="1" dirty="0">
+                <a:solidFill>
+                  <a:srgbClr val="0D1B2A"/>
+                </a:solidFill>
+                <a:latin typeface="Calibri" pitchFamily="34" charset="0"/>
+                <a:ea typeface="Calibri" pitchFamily="34" charset="-122"/>
+                <a:cs typeface="Calibri" pitchFamily="34" charset="-120"/>
+              </a:rPr>
+              <a:t>0.9961</a:t>
+            </a:r>
+            <a:r>
+              <a:rPr lang="en-US" sz="1100" dirty="0">
+                <a:solidFill>
+                  <a:srgbClr val="0D1B2A"/>
+                </a:solidFill>
+                <a:latin typeface="Calibri" pitchFamily="34" charset="0"/>
+                <a:ea typeface="Calibri" pitchFamily="34" charset="-122"/>
+                <a:cs typeface="Calibri" pitchFamily="34" charset="-120"/>
+              </a:rPr>
+              <a:t>：適用 1–2 kHz 取樣率</a:t>
+            </a:r>
+            <a:endParaRPr lang="en-US" sz="1100" dirty="0"/>
+          </a:p>
+        </p:txBody>
+      </p:sp>
+      <p:sp>
+        <p:nvSpPr>
+          <p:cNvPr id="9" name="Shape 7"/>
+          <p:cNvSpPr/>
+          <p:nvPr/>
+        </p:nvSpPr>
+        <p:spPr>
+          <a:xfrm>
+            <a:off x="4800600" y="1051560"/>
+            <a:ext cx="4023360" cy="1828800"/>
+          </a:xfrm>
+          <a:prstGeom prst="rect">
+            <a:avLst/>
+          </a:prstGeom>
+          <a:solidFill>
+            <a:srgbClr val="FFF3F3"/>
+          </a:solidFill>
+          <a:ln w="12700">
+            <a:solidFill>
+              <a:srgbClr val="EF4444"/>
+            </a:solidFill>
+            <a:prstDash val="solid"/>
+          </a:ln>
+        </p:spPr>
+      </p:sp>
+      <p:sp>
+        <p:nvSpPr>
+          <p:cNvPr id="10" name="Shape 8"/>
+          <p:cNvSpPr/>
+          <p:nvPr/>
+        </p:nvSpPr>
+        <p:spPr>
+          <a:xfrm>
+            <a:off x="4800600" y="1051560"/>
+            <a:ext cx="4023360" cy="365760"/>
+          </a:xfrm>
+          <a:prstGeom prst="rect">
+            <a:avLst/>
+          </a:prstGeom>
+          <a:solidFill>
+            <a:srgbClr val="EF4444"/>
+          </a:solidFill>
+          <a:ln/>
+        </p:spPr>
+      </p:sp>
+      <p:sp>
+        <p:nvSpPr>
+          <p:cNvPr id="11" name="Text 9"/>
+          <p:cNvSpPr/>
+          <p:nvPr/>
+        </p:nvSpPr>
+        <p:spPr>
+          <a:xfrm>
+            <a:off x="4846320" y="1051560"/>
+            <a:ext cx="3931920" cy="365760"/>
+          </a:xfrm>
+          <a:prstGeom prst="rect">
+            <a:avLst/>
+          </a:prstGeom>
+          <a:noFill/>
+          <a:ln/>
+        </p:spPr>
+        <p:txBody>
+          <a:bodyPr wrap="square" rtlCol="0" anchor="ctr"/>
+          <a:lstStyle/>
+          <a:p>
+            <a:pPr marL="0" indent="0">
+              <a:buNone/>
+            </a:pPr>
+            <a:r>
+              <a:rPr lang="en-US" sz="1200" b="1" dirty="0">
+                <a:solidFill>
+                  <a:srgbClr val="FFFFFF"/>
+                </a:solidFill>
+                <a:latin typeface="Calibri" pitchFamily="34" charset="0"/>
+                <a:ea typeface="Calibri" pitchFamily="34" charset="-122"/>
+                <a:cs typeface="Calibri" pitchFamily="34" charset="-120"/>
+              </a:rPr>
+              <a:t>SCT 連接偵測（標準差法）</a:t>
+            </a:r>
+            <a:endParaRPr lang="en-US" sz="1200" dirty="0"/>
+          </a:p>
+        </p:txBody>
+      </p:sp>
+      <p:sp>
+        <p:nvSpPr>
+          <p:cNvPr id="12" name="Shape 10"/>
+          <p:cNvSpPr/>
+          <p:nvPr/>
+        </p:nvSpPr>
+        <p:spPr>
+          <a:xfrm>
+            <a:off x="4846320" y="1508760"/>
+            <a:ext cx="1005840" cy="347472"/>
+          </a:xfrm>
+          <a:prstGeom prst="rect">
+            <a:avLst/>
+          </a:prstGeom>
+          <a:solidFill>
+            <a:srgbClr val="EF4444"/>
+          </a:solidFill>
+          <a:ln/>
+        </p:spPr>
+      </p:sp>
+      <p:sp>
+        <p:nvSpPr>
+          <p:cNvPr id="13" name="Text 11"/>
+          <p:cNvSpPr/>
+          <p:nvPr/>
+        </p:nvSpPr>
+        <p:spPr>
+          <a:xfrm>
+            <a:off x="4846320" y="1508760"/>
+            <a:ext cx="1005840" cy="347472"/>
+          </a:xfrm>
+          <a:prstGeom prst="rect">
+            <a:avLst/>
+          </a:prstGeom>
+          <a:noFill/>
+          <a:ln/>
+        </p:spPr>
+        <p:txBody>
+          <a:bodyPr wrap="square" rtlCol="0" anchor="ctr"/>
+          <a:lstStyle/>
+          <a:p>
+            <a:pPr marL="0" indent="0" algn="ctr">
+              <a:buNone/>
+            </a:pPr>
+            <a:r>
+              <a:rPr lang="en-US" sz="950" dirty="0">
+                <a:solidFill>
+                  <a:srgbClr val="FFFFFF"/>
+                </a:solidFill>
+                <a:latin typeface="Calibri" pitchFamily="34" charset="0"/>
+                <a:ea typeface="Calibri" pitchFamily="34" charset="-122"/>
+                <a:cs typeface="Calibri" pitchFamily="34" charset="-120"/>
+              </a:rPr>
+              <a:t>未連接</a:t>
+            </a:r>
+            <a:endParaRPr lang="en-US" sz="950" dirty="0"/>
+          </a:p>
+        </p:txBody>
+      </p:sp>
+      <p:sp>
+        <p:nvSpPr>
+          <p:cNvPr id="14" name="Text 12"/>
+          <p:cNvSpPr/>
+          <p:nvPr/>
+        </p:nvSpPr>
+        <p:spPr>
+          <a:xfrm>
+            <a:off x="5925312" y="1508760"/>
+            <a:ext cx="1828800" cy="347472"/>
+          </a:xfrm>
+          <a:prstGeom prst="rect">
+            <a:avLst/>
+          </a:prstGeom>
+          <a:noFill/>
+          <a:ln/>
+        </p:spPr>
+        <p:txBody>
+          <a:bodyPr wrap="square" rtlCol="0" anchor="ctr"/>
+          <a:lstStyle/>
+          <a:p>
+            <a:pPr marL="0" indent="0">
+              <a:buNone/>
+            </a:pPr>
+            <a:r>
+              <a:rPr lang="en-US" sz="1100" dirty="0">
+                <a:solidFill>
+                  <a:srgbClr val="0D1B2A"/>
+                </a:solidFill>
+                <a:latin typeface="Calibri" pitchFamily="34" charset="0"/>
+                <a:ea typeface="Calibri" pitchFamily="34" charset="-122"/>
+                <a:cs typeface="Calibri" pitchFamily="34" charset="-120"/>
+              </a:rPr>
+              <a:t>標準差 &lt; 2 mV</a:t>
+            </a:r>
+            <a:endParaRPr lang="en-US" sz="1100" dirty="0"/>
+          </a:p>
+        </p:txBody>
+      </p:sp>
+      <p:sp>
+        <p:nvSpPr>
+          <p:cNvPr id="15" name="Shape 13"/>
+          <p:cNvSpPr/>
+          <p:nvPr/>
+        </p:nvSpPr>
+        <p:spPr>
+          <a:xfrm>
+            <a:off x="4846320" y="1938528"/>
+            <a:ext cx="1005840" cy="347472"/>
+          </a:xfrm>
+          <a:prstGeom prst="rect">
+            <a:avLst/>
+          </a:prstGeom>
+          <a:solidFill>
+            <a:srgbClr val="F59E0B"/>
+          </a:solidFill>
+          <a:ln/>
+        </p:spPr>
+      </p:sp>
+      <p:sp>
+        <p:nvSpPr>
+          <p:cNvPr id="16" name="Text 14"/>
+          <p:cNvSpPr/>
+          <p:nvPr/>
+        </p:nvSpPr>
+        <p:spPr>
+          <a:xfrm>
+            <a:off x="4846320" y="1938528"/>
+            <a:ext cx="1005840" cy="347472"/>
+          </a:xfrm>
+          <a:prstGeom prst="rect">
+            <a:avLst/>
+          </a:prstGeom>
+          <a:noFill/>
+          <a:ln/>
+        </p:spPr>
+        <p:txBody>
+          <a:bodyPr wrap="square" rtlCol="0" anchor="ctr"/>
+          <a:lstStyle/>
+          <a:p>
+            <a:pPr marL="0" indent="0" algn="ctr">
+              <a:buNone/>
+            </a:pPr>
+            <a:r>
+              <a:rPr lang="en-US" sz="950" dirty="0">
+                <a:solidFill>
+                  <a:srgbClr val="FFFFFF"/>
+                </a:solidFill>
+                <a:latin typeface="Calibri" pitchFamily="34" charset="0"/>
+                <a:ea typeface="Calibri" pitchFamily="34" charset="-122"/>
+                <a:cs typeface="Calibri" pitchFamily="34" charset="-120"/>
+              </a:rPr>
+              <a:t>已連接（無負載）</a:t>
+            </a:r>
+            <a:endParaRPr lang="en-US" sz="950" dirty="0"/>
+          </a:p>
+        </p:txBody>
+      </p:sp>
+      <p:sp>
+        <p:nvSpPr>
+          <p:cNvPr id="17" name="Text 15"/>
+          <p:cNvSpPr/>
+          <p:nvPr/>
+        </p:nvSpPr>
+        <p:spPr>
+          <a:xfrm>
+            <a:off x="5925312" y="1938528"/>
+            <a:ext cx="1828800" cy="347472"/>
+          </a:xfrm>
+          <a:prstGeom prst="rect">
+            <a:avLst/>
+          </a:prstGeom>
+          <a:noFill/>
+          <a:ln/>
+        </p:spPr>
+        <p:txBody>
+          <a:bodyPr wrap="square" rtlCol="0" anchor="ctr"/>
+          <a:lstStyle/>
+          <a:p>
+            <a:pPr marL="0" indent="0">
+              <a:buNone/>
+            </a:pPr>
+            <a:r>
+              <a:rPr lang="en-US" sz="1100" dirty="0">
+                <a:solidFill>
+                  <a:srgbClr val="0D1B2A"/>
+                </a:solidFill>
+                <a:latin typeface="Calibri" pitchFamily="34" charset="0"/>
+                <a:ea typeface="Calibri" pitchFamily="34" charset="-122"/>
+                <a:cs typeface="Calibri" pitchFamily="34" charset="-120"/>
+              </a:rPr>
+              <a:t>標準差 &gt; 5 mV</a:t>
+            </a:r>
+            <a:endParaRPr lang="en-US" sz="1100" dirty="0"/>
+          </a:p>
+        </p:txBody>
+      </p:sp>
+      <p:sp>
+        <p:nvSpPr>
+          <p:cNvPr id="18" name="Shape 16"/>
+          <p:cNvSpPr/>
+          <p:nvPr/>
+        </p:nvSpPr>
+        <p:spPr>
+          <a:xfrm>
+            <a:off x="4846320" y="2368296"/>
+            <a:ext cx="1005840" cy="347472"/>
+          </a:xfrm>
+          <a:prstGeom prst="rect">
+            <a:avLst/>
+          </a:prstGeom>
+          <a:solidFill>
+            <a:srgbClr val="10B981"/>
+          </a:solidFill>
+          <a:ln/>
+        </p:spPr>
+      </p:sp>
+      <p:sp>
+        <p:nvSpPr>
+          <p:cNvPr id="19" name="Text 17"/>
+          <p:cNvSpPr/>
+          <p:nvPr/>
+        </p:nvSpPr>
+        <p:spPr>
+          <a:xfrm>
+            <a:off x="4846320" y="2368296"/>
+            <a:ext cx="1005840" cy="347472"/>
+          </a:xfrm>
+          <a:prstGeom prst="rect">
+            <a:avLst/>
+          </a:prstGeom>
+          <a:noFill/>
+          <a:ln/>
+        </p:spPr>
+        <p:txBody>
+          <a:bodyPr wrap="square" rtlCol="0" anchor="ctr"/>
+          <a:lstStyle/>
+          <a:p>
+            <a:pPr marL="0" indent="0" algn="ctr">
+              <a:buNone/>
+            </a:pPr>
+            <a:r>
+              <a:rPr lang="en-US" sz="950" dirty="0">
+                <a:solidFill>
+                  <a:srgbClr val="FFFFFF"/>
+                </a:solidFill>
+                <a:latin typeface="Calibri" pitchFamily="34" charset="0"/>
+                <a:ea typeface="Calibri" pitchFamily="34" charset="-122"/>
+                <a:cs typeface="Calibri" pitchFamily="34" charset="-120"/>
+              </a:rPr>
+              <a:t>已連接（有負載）</a:t>
+            </a:r>
+            <a:endParaRPr lang="en-US" sz="950" dirty="0"/>
+          </a:p>
+        </p:txBody>
+      </p:sp>
+      <p:sp>
+        <p:nvSpPr>
+          <p:cNvPr id="20" name="Text 18"/>
+          <p:cNvSpPr/>
+          <p:nvPr/>
+        </p:nvSpPr>
+        <p:spPr>
+          <a:xfrm>
+            <a:off x="5925312" y="2368296"/>
+            <a:ext cx="1828800" cy="347472"/>
+          </a:xfrm>
+          <a:prstGeom prst="rect">
+            <a:avLst/>
+          </a:prstGeom>
+          <a:noFill/>
+          <a:ln/>
+        </p:spPr>
+        <p:txBody>
+          <a:bodyPr wrap="square" rtlCol="0" anchor="ctr"/>
+          <a:lstStyle/>
+          <a:p>
+            <a:pPr marL="0" indent="0">
+              <a:buNone/>
+            </a:pPr>
+            <a:r>
+              <a:rPr lang="en-US" sz="1100" dirty="0">
+                <a:solidFill>
+                  <a:srgbClr val="0D1B2A"/>
+                </a:solidFill>
+                <a:latin typeface="Calibri" pitchFamily="34" charset="0"/>
+                <a:ea typeface="Calibri" pitchFamily="34" charset="-122"/>
+                <a:cs typeface="Calibri" pitchFamily="34" charset="-120"/>
+              </a:rPr>
+              <a:t>標準差 &gt;&gt; 10 mV</a:t>
+            </a:r>
+            <a:endParaRPr lang="en-US" sz="1100" dirty="0"/>
+          </a:p>
+        </p:txBody>
+      </p:sp>
+      <p:sp>
+        <p:nvSpPr>
+          <p:cNvPr id="21" name="Text 19"/>
+          <p:cNvSpPr/>
+          <p:nvPr/>
+        </p:nvSpPr>
+        <p:spPr>
+          <a:xfrm>
+            <a:off x="4919472" y="2647188"/>
+            <a:ext cx="3840480" cy="320040"/>
+          </a:xfrm>
+          <a:prstGeom prst="rect">
+            <a:avLst/>
+          </a:prstGeom>
+          <a:noFill/>
+          <a:ln/>
+        </p:spPr>
+        <p:txBody>
+          <a:bodyPr wrap="square" rtlCol="0" anchor="ctr"/>
+          <a:lstStyle/>
+          <a:p>
+            <a:pPr marL="0" indent="0">
+              <a:buNone/>
+            </a:pPr>
+            <a:r>
+              <a:rPr lang="en-US" sz="1100" i="1" dirty="0">
+                <a:solidFill>
+                  <a:srgbClr val="64748B"/>
+                </a:solidFill>
+                <a:latin typeface="Calibri" pitchFamily="34" charset="0"/>
+                <a:ea typeface="Calibri" pitchFamily="34" charset="-122"/>
+                <a:cs typeface="Calibri" pitchFamily="34" charset="-120"/>
+              </a:rPr>
+              <a:t>→ 取 50 樣本，標準差 &lt; 3mV 判定未連接</a:t>
+            </a:r>
+            <a:endParaRPr lang="en-US" sz="1100" dirty="0"/>
+          </a:p>
+        </p:txBody>
+      </p:sp>
+      <p:sp>
+        <p:nvSpPr>
+          <p:cNvPr id="22" name="Shape 20"/>
+          <p:cNvSpPr/>
+          <p:nvPr/>
+        </p:nvSpPr>
+        <p:spPr>
+          <a:xfrm>
+            <a:off x="320040" y="3017520"/>
+            <a:ext cx="8503920" cy="365760"/>
+          </a:xfrm>
+          <a:prstGeom prst="rect">
+            <a:avLst/>
+          </a:prstGeom>
+          <a:solidFill>
+            <a:srgbClr val="1B4F72"/>
+          </a:solidFill>
+          <a:ln/>
+        </p:spPr>
+      </p:sp>
+      <p:sp>
+        <p:nvSpPr>
+          <p:cNvPr id="23" name="Text 21"/>
+          <p:cNvSpPr/>
+          <p:nvPr/>
+        </p:nvSpPr>
+        <p:spPr>
+          <a:xfrm>
+            <a:off x="320040" y="3017520"/>
+            <a:ext cx="8503920" cy="365760"/>
+          </a:xfrm>
+          <a:prstGeom prst="rect">
+            <a:avLst/>
+          </a:prstGeom>
+          <a:noFill/>
+          <a:ln/>
+        </p:spPr>
+        <p:txBody>
+          <a:bodyPr wrap="square" rtlCol="0" anchor="ctr"/>
+          <a:lstStyle/>
+          <a:p>
+            <a:pPr marL="0" indent="0" algn="ctr">
+              <a:buNone/>
+            </a:pPr>
+            <a:r>
+              <a:rPr lang="en-US" sz="1300" b="1" dirty="0">
+                <a:solidFill>
+                  <a:srgbClr val="FFFFFF"/>
+                </a:solidFill>
+                <a:latin typeface="Calibri" pitchFamily="34" charset="0"/>
+                <a:ea typeface="Calibri" pitchFamily="34" charset="-122"/>
+                <a:cs typeface="Calibri" pitchFamily="34" charset="-120"/>
+              </a:rPr>
+              <a:t>RMS 電流計算流程</a:t>
+            </a:r>
+            <a:endParaRPr lang="en-US" sz="1300" dirty="0"/>
+          </a:p>
+        </p:txBody>
+      </p:sp>
+      <p:sp>
+        <p:nvSpPr>
+          <p:cNvPr id="24" name="Shape 22"/>
+          <p:cNvSpPr/>
+          <p:nvPr/>
+        </p:nvSpPr>
+        <p:spPr>
+          <a:xfrm>
+            <a:off x="320040" y="3474720"/>
+            <a:ext cx="1261872" cy="1005840"/>
+          </a:xfrm>
+          <a:prstGeom prst="rect">
+            <a:avLst/>
+          </a:prstGeom>
+          <a:solidFill>
+            <a:srgbClr val="0D1B2A"/>
+          </a:solidFill>
+          <a:ln w="12700">
+            <a:solidFill>
+              <a:srgbClr val="FFFFFF"/>
+            </a:solidFill>
+            <a:prstDash val="solid"/>
+          </a:ln>
+        </p:spPr>
+      </p:sp>
+      <p:sp>
+        <p:nvSpPr>
+          <p:cNvPr id="25" name="Text 23"/>
+          <p:cNvSpPr/>
+          <p:nvPr/>
+        </p:nvSpPr>
+        <p:spPr>
+          <a:xfrm>
+            <a:off x="320040" y="3493008"/>
+            <a:ext cx="1261872" cy="347472"/>
+          </a:xfrm>
+          <a:prstGeom prst="rect">
+            <a:avLst/>
+          </a:prstGeom>
+          <a:noFill/>
+          <a:ln/>
+        </p:spPr>
+        <p:txBody>
+          <a:bodyPr wrap="square" rtlCol="0" anchor="ctr"/>
+          <a:lstStyle/>
+          <a:p>
+            <a:pPr marL="0" indent="0" algn="ctr">
+              <a:buNone/>
+            </a:pPr>
+            <a:r>
+              <a:rPr lang="en-US" sz="1600" b="1" dirty="0">
+                <a:solidFill>
+                  <a:srgbClr val="00A8CC"/>
+                </a:solidFill>
+                <a:latin typeface="Calibri" pitchFamily="34" charset="0"/>
+                <a:ea typeface="Calibri" pitchFamily="34" charset="-122"/>
+                <a:cs typeface="Calibri" pitchFamily="34" charset="-120"/>
+              </a:rPr>
+              <a:t>1.</a:t>
+            </a:r>
+            <a:endParaRPr lang="en-US" sz="1600" dirty="0"/>
+          </a:p>
+        </p:txBody>
+      </p:sp>
+      <p:sp>
+        <p:nvSpPr>
+          <p:cNvPr id="26" name="Text 24"/>
+          <p:cNvSpPr/>
+          <p:nvPr/>
+        </p:nvSpPr>
+        <p:spPr>
+          <a:xfrm>
+            <a:off x="320040" y="3840480"/>
+            <a:ext cx="1261872" cy="594360"/>
+          </a:xfrm>
+          <a:prstGeom prst="rect">
+            <a:avLst/>
+          </a:prstGeom>
+          <a:noFill/>
+          <a:ln/>
+        </p:spPr>
+        <p:txBody>
+          <a:bodyPr wrap="square" rtlCol="0" anchor="ctr"/>
+          <a:lstStyle/>
+          <a:p>
+            <a:pPr marL="0" indent="0" algn="ctr">
+              <a:buNone/>
+            </a:pPr>
+            <a:r>
+              <a:rPr lang="en-US" sz="1100" dirty="0">
+                <a:solidFill>
+                  <a:srgbClr val="FFFFFF"/>
+                </a:solidFill>
+                <a:latin typeface="Calibri" pitchFamily="34" charset="0"/>
+                <a:ea typeface="Calibri" pitchFamily="34" charset="-122"/>
+                <a:cs typeface="Calibri" pitchFamily="34" charset="-120"/>
+              </a:rPr>
+              <a:t>200ms 取樣窗口</a:t>
+            </a:r>
+            <a:endParaRPr lang="en-US" sz="1100" dirty="0"/>
+          </a:p>
+        </p:txBody>
+      </p:sp>
+      <p:sp>
+        <p:nvSpPr>
+          <p:cNvPr id="27" name="Shape 25"/>
+          <p:cNvSpPr/>
+          <p:nvPr/>
+        </p:nvSpPr>
+        <p:spPr>
+          <a:xfrm>
+            <a:off x="1764792" y="3474720"/>
+            <a:ext cx="1261872" cy="1005840"/>
+          </a:xfrm>
+          <a:prstGeom prst="rect">
+            <a:avLst/>
+          </a:prstGeom>
+          <a:solidFill>
+            <a:srgbClr val="1B4F72"/>
+          </a:solidFill>
+          <a:ln w="12700">
+            <a:solidFill>
+              <a:srgbClr val="FFFFFF"/>
+            </a:solidFill>
+            <a:prstDash val="solid"/>
+          </a:ln>
+        </p:spPr>
+      </p:sp>
+      <p:sp>
+        <p:nvSpPr>
+          <p:cNvPr id="28" name="Text 26"/>
+          <p:cNvSpPr/>
+          <p:nvPr/>
+        </p:nvSpPr>
+        <p:spPr>
+          <a:xfrm>
+            <a:off x="1764792" y="3493008"/>
+            <a:ext cx="1261872" cy="347472"/>
+          </a:xfrm>
+          <a:prstGeom prst="rect">
+            <a:avLst/>
+          </a:prstGeom>
+          <a:noFill/>
+          <a:ln/>
+        </p:spPr>
+        <p:txBody>
+          <a:bodyPr wrap="square" rtlCol="0" anchor="ctr"/>
+          <a:lstStyle/>
+          <a:p>
+            <a:pPr marL="0" indent="0" algn="ctr">
+              <a:buNone/>
+            </a:pPr>
+            <a:r>
+              <a:rPr lang="en-US" sz="1600" b="1" dirty="0">
+                <a:solidFill>
+                  <a:srgbClr val="00A8CC"/>
+                </a:solidFill>
+                <a:latin typeface="Calibri" pitchFamily="34" charset="0"/>
+                <a:ea typeface="Calibri" pitchFamily="34" charset="-122"/>
+                <a:cs typeface="Calibri" pitchFamily="34" charset="-120"/>
+              </a:rPr>
+              <a:t>2.</a:t>
+            </a:r>
+            <a:endParaRPr lang="en-US" sz="1600" dirty="0"/>
+          </a:p>
+        </p:txBody>
+      </p:sp>
+      <p:sp>
+        <p:nvSpPr>
+          <p:cNvPr id="29" name="Text 27"/>
+          <p:cNvSpPr/>
+          <p:nvPr/>
+        </p:nvSpPr>
+        <p:spPr>
+          <a:xfrm>
+            <a:off x="1764792" y="3840480"/>
+            <a:ext cx="1261872" cy="594360"/>
+          </a:xfrm>
+          <a:prstGeom prst="rect">
+            <a:avLst/>
+          </a:prstGeom>
+          <a:noFill/>
+          <a:ln/>
+        </p:spPr>
+        <p:txBody>
+          <a:bodyPr wrap="square" rtlCol="0" anchor="ctr"/>
+          <a:lstStyle/>
+          <a:p>
+            <a:pPr marL="0" indent="0" algn="ctr">
+              <a:buNone/>
+            </a:pPr>
+            <a:r>
+              <a:rPr lang="en-US" sz="1100" dirty="0">
+                <a:solidFill>
+                  <a:srgbClr val="FFFFFF"/>
+                </a:solidFill>
+                <a:latin typeface="Calibri" pitchFamily="34" charset="0"/>
+                <a:ea typeface="Calibri" pitchFamily="34" charset="-122"/>
+                <a:cs typeface="Calibri" pitchFamily="34" charset="-120"/>
+              </a:rPr>
+              <a:t>HPF 濾除 DC</a:t>
+            </a:r>
+            <a:endParaRPr lang="en-US" sz="1100" dirty="0"/>
+          </a:p>
+        </p:txBody>
+      </p:sp>
+      <p:sp>
+        <p:nvSpPr>
+          <p:cNvPr id="30" name="Shape 28"/>
+          <p:cNvSpPr/>
+          <p:nvPr/>
+        </p:nvSpPr>
+        <p:spPr>
+          <a:xfrm>
+            <a:off x="3209544" y="3474720"/>
+            <a:ext cx="1261872" cy="1005840"/>
+          </a:xfrm>
+          <a:prstGeom prst="rect">
+            <a:avLst/>
+          </a:prstGeom>
+          <a:solidFill>
+            <a:srgbClr val="0D1B2A"/>
+          </a:solidFill>
+          <a:ln w="12700">
+            <a:solidFill>
+              <a:srgbClr val="FFFFFF"/>
+            </a:solidFill>
+            <a:prstDash val="solid"/>
+          </a:ln>
+        </p:spPr>
+      </p:sp>
+      <p:sp>
+        <p:nvSpPr>
+          <p:cNvPr id="31" name="Text 29"/>
+          <p:cNvSpPr/>
+          <p:nvPr/>
+        </p:nvSpPr>
+        <p:spPr>
+          <a:xfrm>
+            <a:off x="3209544" y="3493008"/>
+            <a:ext cx="1261872" cy="347472"/>
+          </a:xfrm>
+          <a:prstGeom prst="rect">
+            <a:avLst/>
+          </a:prstGeom>
+          <a:noFill/>
+          <a:ln/>
+        </p:spPr>
+        <p:txBody>
+          <a:bodyPr wrap="square" rtlCol="0" anchor="ctr"/>
+          <a:lstStyle/>
+          <a:p>
+            <a:pPr marL="0" indent="0" algn="ctr">
+              <a:buNone/>
+            </a:pPr>
+            <a:r>
+              <a:rPr lang="en-US" sz="1600" b="1" dirty="0">
+                <a:solidFill>
+                  <a:srgbClr val="00A8CC"/>
+                </a:solidFill>
+                <a:latin typeface="Calibri" pitchFamily="34" charset="0"/>
+                <a:ea typeface="Calibri" pitchFamily="34" charset="-122"/>
+                <a:cs typeface="Calibri" pitchFamily="34" charset="-120"/>
+              </a:rPr>
+              <a:t>3.</a:t>
+            </a:r>
+            <a:endParaRPr lang="en-US" sz="1600" dirty="0"/>
+          </a:p>
+        </p:txBody>
+      </p:sp>
+      <p:sp>
+        <p:nvSpPr>
+          <p:cNvPr id="32" name="Text 30"/>
+          <p:cNvSpPr/>
+          <p:nvPr/>
+        </p:nvSpPr>
+        <p:spPr>
+          <a:xfrm>
+            <a:off x="3209544" y="3840480"/>
+            <a:ext cx="1261872" cy="594360"/>
+          </a:xfrm>
+          <a:prstGeom prst="rect">
+            <a:avLst/>
+          </a:prstGeom>
+          <a:noFill/>
+          <a:ln/>
+        </p:spPr>
+        <p:txBody>
+          <a:bodyPr wrap="square" rtlCol="0" anchor="ctr"/>
+          <a:lstStyle/>
+          <a:p>
+            <a:pPr marL="0" indent="0" algn="ctr">
+              <a:buNone/>
+            </a:pPr>
+            <a:r>
+              <a:rPr lang="en-US" sz="1100" dirty="0">
+                <a:solidFill>
+                  <a:srgbClr val="FFFFFF"/>
+                </a:solidFill>
+                <a:latin typeface="Calibri" pitchFamily="34" charset="0"/>
+                <a:ea typeface="Calibri" pitchFamily="34" charset="-122"/>
+                <a:cs typeface="Calibri" pitchFamily="34" charset="-120"/>
+              </a:rPr>
+              <a:t>樣本平方累加</a:t>
+            </a:r>
+            <a:endParaRPr lang="en-US" sz="1100" dirty="0"/>
+          </a:p>
+        </p:txBody>
+      </p:sp>
+      <p:sp>
+        <p:nvSpPr>
+          <p:cNvPr id="33" name="Shape 31"/>
+          <p:cNvSpPr/>
+          <p:nvPr/>
+        </p:nvSpPr>
+        <p:spPr>
+          <a:xfrm>
+            <a:off x="4654296" y="3474720"/>
+            <a:ext cx="1261872" cy="1005840"/>
+          </a:xfrm>
+          <a:prstGeom prst="rect">
+            <a:avLst/>
+          </a:prstGeom>
+          <a:solidFill>
+            <a:srgbClr val="1B4F72"/>
+          </a:solidFill>
+          <a:ln w="12700">
+            <a:solidFill>
+              <a:srgbClr val="FFFFFF"/>
+            </a:solidFill>
+            <a:prstDash val="solid"/>
+          </a:ln>
+        </p:spPr>
+      </p:sp>
+      <p:sp>
+        <p:nvSpPr>
+          <p:cNvPr id="34" name="Text 32"/>
+          <p:cNvSpPr/>
+          <p:nvPr/>
+        </p:nvSpPr>
+        <p:spPr>
+          <a:xfrm>
+            <a:off x="4654296" y="3493008"/>
+            <a:ext cx="1261872" cy="347472"/>
+          </a:xfrm>
+          <a:prstGeom prst="rect">
+            <a:avLst/>
+          </a:prstGeom>
+          <a:noFill/>
+          <a:ln/>
+        </p:spPr>
+        <p:txBody>
+          <a:bodyPr wrap="square" rtlCol="0" anchor="ctr"/>
+          <a:lstStyle/>
+          <a:p>
+            <a:pPr marL="0" indent="0" algn="ctr">
+              <a:buNone/>
+            </a:pPr>
+            <a:r>
+              <a:rPr lang="en-US" sz="1600" b="1" dirty="0">
+                <a:solidFill>
+                  <a:srgbClr val="00A8CC"/>
+                </a:solidFill>
+                <a:latin typeface="Calibri" pitchFamily="34" charset="0"/>
+                <a:ea typeface="Calibri" pitchFamily="34" charset="-122"/>
+                <a:cs typeface="Calibri" pitchFamily="34" charset="-120"/>
+              </a:rPr>
+              <a:t>4.</a:t>
+            </a:r>
+            <a:endParaRPr lang="en-US" sz="1600" dirty="0"/>
+          </a:p>
+        </p:txBody>
+      </p:sp>
+      <p:sp>
+        <p:nvSpPr>
+          <p:cNvPr id="35" name="Text 33"/>
+          <p:cNvSpPr/>
+          <p:nvPr/>
+        </p:nvSpPr>
+        <p:spPr>
+          <a:xfrm>
+            <a:off x="4654296" y="3840480"/>
+            <a:ext cx="1261872" cy="594360"/>
+          </a:xfrm>
+          <a:prstGeom prst="rect">
+            <a:avLst/>
+          </a:prstGeom>
+          <a:noFill/>
+          <a:ln/>
+        </p:spPr>
+        <p:txBody>
+          <a:bodyPr wrap="square" rtlCol="0" anchor="ctr"/>
+          <a:lstStyle/>
+          <a:p>
+            <a:pPr marL="0" indent="0" algn="ctr">
+              <a:buNone/>
+            </a:pPr>
+            <a:r>
+              <a:rPr lang="en-US" sz="1100" dirty="0">
+                <a:solidFill>
+                  <a:srgbClr val="FFFFFF"/>
+                </a:solidFill>
+                <a:latin typeface="Calibri" pitchFamily="34" charset="0"/>
+                <a:ea typeface="Calibri" pitchFamily="34" charset="-122"/>
+                <a:cs typeface="Calibri" pitchFamily="34" charset="-120"/>
+              </a:rPr>
+              <a:t>開根號 RMS</a:t>
+            </a:r>
+            <a:endParaRPr lang="en-US" sz="1100" dirty="0"/>
+          </a:p>
+        </p:txBody>
+      </p:sp>
+      <p:sp>
+        <p:nvSpPr>
+          <p:cNvPr id="36" name="Shape 34"/>
+          <p:cNvSpPr/>
+          <p:nvPr/>
+        </p:nvSpPr>
+        <p:spPr>
+          <a:xfrm>
+            <a:off x="6099048" y="3474720"/>
+            <a:ext cx="1261872" cy="1005840"/>
+          </a:xfrm>
+          <a:prstGeom prst="rect">
+            <a:avLst/>
+          </a:prstGeom>
+          <a:solidFill>
+            <a:srgbClr val="0D1B2A"/>
+          </a:solidFill>
+          <a:ln w="12700">
+            <a:solidFill>
+              <a:srgbClr val="FFFFFF"/>
+            </a:solidFill>
+            <a:prstDash val="solid"/>
+          </a:ln>
+        </p:spPr>
+      </p:sp>
+      <p:sp>
+        <p:nvSpPr>
+          <p:cNvPr id="37" name="Text 35"/>
+          <p:cNvSpPr/>
+          <p:nvPr/>
+        </p:nvSpPr>
+        <p:spPr>
+          <a:xfrm>
+            <a:off x="6099048" y="3493008"/>
+            <a:ext cx="1261872" cy="347472"/>
+          </a:xfrm>
+          <a:prstGeom prst="rect">
+            <a:avLst/>
+          </a:prstGeom>
+          <a:noFill/>
+          <a:ln/>
+        </p:spPr>
+        <p:txBody>
+          <a:bodyPr wrap="square" rtlCol="0" anchor="ctr"/>
+          <a:lstStyle/>
+          <a:p>
+            <a:pPr marL="0" indent="0" algn="ctr">
+              <a:buNone/>
+            </a:pPr>
+            <a:r>
+              <a:rPr lang="en-US" sz="1600" b="1" dirty="0">
+                <a:solidFill>
+                  <a:srgbClr val="00A8CC"/>
+                </a:solidFill>
+                <a:latin typeface="Calibri" pitchFamily="34" charset="0"/>
+                <a:ea typeface="Calibri" pitchFamily="34" charset="-122"/>
+                <a:cs typeface="Calibri" pitchFamily="34" charset="-120"/>
+              </a:rPr>
+              <a:t>5.</a:t>
+            </a:r>
+            <a:endParaRPr lang="en-US" sz="1600" dirty="0"/>
+          </a:p>
+        </p:txBody>
+      </p:sp>
+      <p:sp>
+        <p:nvSpPr>
+          <p:cNvPr id="38" name="Text 36"/>
+          <p:cNvSpPr/>
+          <p:nvPr/>
+        </p:nvSpPr>
+        <p:spPr>
+          <a:xfrm>
+            <a:off x="6099048" y="3840480"/>
+            <a:ext cx="1261872" cy="594360"/>
+          </a:xfrm>
+          <a:prstGeom prst="rect">
+            <a:avLst/>
+          </a:prstGeom>
+          <a:noFill/>
+          <a:ln/>
+        </p:spPr>
+        <p:txBody>
+          <a:bodyPr wrap="square" rtlCol="0" anchor="ctr"/>
+          <a:lstStyle/>
+          <a:p>
+            <a:pPr marL="0" indent="0" algn="ctr">
+              <a:buNone/>
+            </a:pPr>
+            <a:r>
+              <a:rPr lang="en-US" sz="1100" dirty="0">
+                <a:solidFill>
+                  <a:srgbClr val="FFFFFF"/>
+                </a:solidFill>
+                <a:latin typeface="Calibri" pitchFamily="34" charset="0"/>
+                <a:ea typeface="Calibri" pitchFamily="34" charset="-122"/>
+                <a:cs typeface="Calibri" pitchFamily="34" charset="-120"/>
+              </a:rPr>
+              <a:t>換算電流值</a:t>
+            </a:r>
+            <a:endParaRPr lang="en-US" sz="1100" dirty="0"/>
+          </a:p>
+        </p:txBody>
+      </p:sp>
+      <p:sp>
+        <p:nvSpPr>
+          <p:cNvPr id="39" name="Shape 37"/>
+          <p:cNvSpPr/>
+          <p:nvPr/>
+        </p:nvSpPr>
+        <p:spPr>
+          <a:xfrm>
+            <a:off x="7543800" y="3474720"/>
+            <a:ext cx="1261872" cy="1005840"/>
+          </a:xfrm>
+          <a:prstGeom prst="rect">
+            <a:avLst/>
+          </a:prstGeom>
+          <a:solidFill>
+            <a:srgbClr val="1B4F72"/>
+          </a:solidFill>
+          <a:ln w="12700">
+            <a:solidFill>
+              <a:srgbClr val="FFFFFF"/>
+            </a:solidFill>
+            <a:prstDash val="solid"/>
+          </a:ln>
+        </p:spPr>
+      </p:sp>
+      <p:sp>
+        <p:nvSpPr>
+          <p:cNvPr id="40" name="Text 38"/>
+          <p:cNvSpPr/>
+          <p:nvPr/>
+        </p:nvSpPr>
+        <p:spPr>
+          <a:xfrm>
+            <a:off x="7543800" y="3493008"/>
+            <a:ext cx="1261872" cy="347472"/>
+          </a:xfrm>
+          <a:prstGeom prst="rect">
+            <a:avLst/>
+          </a:prstGeom>
+          <a:noFill/>
+          <a:ln/>
+        </p:spPr>
+        <p:txBody>
+          <a:bodyPr wrap="square" rtlCol="0" anchor="ctr"/>
+          <a:lstStyle/>
+          <a:p>
+            <a:pPr marL="0" indent="0" algn="ctr">
+              <a:buNone/>
+            </a:pPr>
+            <a:r>
+              <a:rPr lang="en-US" sz="1600" b="1" dirty="0">
+                <a:solidFill>
+                  <a:srgbClr val="00A8CC"/>
+                </a:solidFill>
+                <a:latin typeface="Calibri" pitchFamily="34" charset="0"/>
+                <a:ea typeface="Calibri" pitchFamily="34" charset="-122"/>
+                <a:cs typeface="Calibri" pitchFamily="34" charset="-120"/>
+              </a:rPr>
+              <a:t>6.</a:t>
+            </a:r>
+            <a:endParaRPr lang="en-US" sz="1600" dirty="0"/>
+          </a:p>
+        </p:txBody>
+      </p:sp>
+      <p:sp>
+        <p:nvSpPr>
+          <p:cNvPr id="41" name="Text 39"/>
+          <p:cNvSpPr/>
+          <p:nvPr/>
+        </p:nvSpPr>
+        <p:spPr>
+          <a:xfrm>
+            <a:off x="7543800" y="3840480"/>
+            <a:ext cx="1261872" cy="594360"/>
+          </a:xfrm>
+          <a:prstGeom prst="rect">
+            <a:avLst/>
+          </a:prstGeom>
+          <a:noFill/>
+          <a:ln/>
+        </p:spPr>
+        <p:txBody>
+          <a:bodyPr wrap="square" rtlCol="0" anchor="ctr"/>
+          <a:lstStyle/>
+          <a:p>
+            <a:pPr marL="0" indent="0" algn="ctr">
+              <a:buNone/>
+            </a:pPr>
+            <a:r>
+              <a:rPr lang="en-US" sz="1100" dirty="0">
+                <a:solidFill>
+                  <a:srgbClr val="FFFFFF"/>
+                </a:solidFill>
+                <a:latin typeface="Calibri" pitchFamily="34" charset="0"/>
+                <a:ea typeface="Calibri" pitchFamily="34" charset="-122"/>
+                <a:cs typeface="Calibri" pitchFamily="34" charset="-120"/>
+              </a:rPr>
+              <a:t>雜訊門檻歸零</a:t>
+            </a:r>
+            <a:endParaRPr lang="en-US" sz="1100" dirty="0"/>
+          </a:p>
+        </p:txBody>
+      </p:sp>
+    </p:spTree>
+  </p:cSld>
+  <p:clrMapOvr>
+    <a:masterClrMapping/>
+  </p:clrMapOvr>
+</p:sld>
+</file>
+
+<file path=ppt/slides/slide11.xml><?xml version="1.0" encoding="utf-8"?>
+<p:sld xmlns:a="http://schemas.openxmlformats.org/drawingml/2006/main" xmlns:r="http://schemas.openxmlformats.org/officeDocument/2006/relationships" xmlns:p="http://schemas.openxmlformats.org/presentationml/2006/main">
+  <p:cSld name="Slide 8">
+    <p:bg>
+      <p:bgPr>
+        <a:solidFill>
+          <a:srgbClr val="FFFFFF"/>
+        </a:solidFill>
+        <a:effectLst/>
+      </p:bgPr>
+    </p:bg>
+    <p:spTree>
+      <p:nvGrpSpPr>
+        <p:cNvPr id="1" name=""/>
+        <p:cNvGrpSpPr/>
+        <p:nvPr/>
+      </p:nvGrpSpPr>
+      <p:grpSpPr>
+        <a:xfrm>
+          <a:off x="0" y="0"/>
+          <a:ext cx="0" cy="0"/>
+          <a:chOff x="0" y="0"/>
+          <a:chExt cx="0" cy="0"/>
+        </a:xfrm>
+      </p:grpSpPr>
+      <p:sp>
+        <p:nvSpPr>
+          <p:cNvPr id="2" name="Shape 0"/>
+          <p:cNvSpPr/>
+          <p:nvPr/>
+        </p:nvSpPr>
+        <p:spPr>
+          <a:xfrm>
+            <a:off x="0" y="0"/>
+            <a:ext cx="9144000" cy="960120"/>
+          </a:xfrm>
+          <a:prstGeom prst="rect">
+            <a:avLst/>
+          </a:prstGeom>
+          <a:solidFill>
+            <a:srgbClr val="0D1B2A"/>
+          </a:solidFill>
+          <a:ln/>
+        </p:spPr>
+      </p:sp>
+      <p:sp>
+        <p:nvSpPr>
+          <p:cNvPr id="3" name="Text 1"/>
+          <p:cNvSpPr/>
+          <p:nvPr/>
+        </p:nvSpPr>
+        <p:spPr>
+          <a:xfrm>
+            <a:off x="457200" y="91440"/>
+            <a:ext cx="8229600" cy="777240"/>
+          </a:xfrm>
+          <a:prstGeom prst="rect">
+            <a:avLst/>
+          </a:prstGeom>
+          <a:noFill/>
+          <a:ln/>
+        </p:spPr>
+        <p:txBody>
+          <a:bodyPr wrap="square" rtlCol="0" anchor="ctr"/>
+          <a:lstStyle/>
+          <a:p>
+            <a:pPr marL="0" indent="0">
+              <a:buNone/>
+            </a:pPr>
+            <a:r>
+              <a:rPr lang="en-US" sz="2600" b="1" dirty="0">
+                <a:solidFill>
+                  <a:srgbClr val="FFFFFF"/>
+                </a:solidFill>
+                <a:latin typeface="Calibri" pitchFamily="34" charset="0"/>
+                <a:ea typeface="Calibri" pitchFamily="34" charset="-122"/>
+                <a:cs typeface="Calibri" pitchFamily="34" charset="-120"/>
+              </a:rPr>
+              <a:t>05　評估方法與測試設計</a:t>
+            </a:r>
+            <a:endParaRPr lang="en-US" sz="2600" dirty="0"/>
+          </a:p>
+        </p:txBody>
+      </p:sp>
+      <p:sp>
+        <p:nvSpPr>
+          <p:cNvPr id="4" name="Shape 2"/>
+          <p:cNvSpPr/>
+          <p:nvPr/>
+        </p:nvSpPr>
+        <p:spPr>
+          <a:xfrm>
+            <a:off x="320040" y="1097280"/>
+            <a:ext cx="4114800" cy="2377440"/>
+          </a:xfrm>
+          <a:prstGeom prst="rect">
+            <a:avLst/>
+          </a:prstGeom>
+          <a:solidFill>
+            <a:srgbClr val="F1F5F9"/>
+          </a:solidFill>
+          <a:ln w="12700">
+            <a:solidFill>
+              <a:srgbClr val="1B4F72"/>
+            </a:solidFill>
+            <a:prstDash val="solid"/>
+          </a:ln>
+        </p:spPr>
+      </p:sp>
+      <p:sp>
+        <p:nvSpPr>
+          <p:cNvPr id="5" name="Shape 3"/>
+          <p:cNvSpPr/>
+          <p:nvPr/>
+        </p:nvSpPr>
+        <p:spPr>
+          <a:xfrm>
+            <a:off x="320040" y="1097280"/>
+            <a:ext cx="4114800" cy="457200"/>
+          </a:xfrm>
+          <a:prstGeom prst="rect">
+            <a:avLst/>
+          </a:prstGeom>
+          <a:solidFill>
+            <a:srgbClr val="1B4F72"/>
+          </a:solidFill>
+          <a:ln/>
+        </p:spPr>
+      </p:sp>
+      <p:sp>
+        <p:nvSpPr>
+          <p:cNvPr id="6" name="Text 4"/>
+          <p:cNvSpPr/>
+          <p:nvPr/>
+        </p:nvSpPr>
+        <p:spPr>
+          <a:xfrm>
+            <a:off x="457200" y="1097280"/>
+            <a:ext cx="3840480" cy="457200"/>
+          </a:xfrm>
+          <a:prstGeom prst="rect">
+            <a:avLst/>
+          </a:prstGeom>
+          <a:noFill/>
+          <a:ln/>
+        </p:spPr>
+        <p:txBody>
+          <a:bodyPr wrap="square" rtlCol="0" anchor="ctr"/>
+          <a:lstStyle/>
+          <a:p>
+            <a:pPr marL="0" indent="0">
+              <a:buNone/>
+            </a:pPr>
+            <a:r>
+              <a:rPr lang="en-US" sz="1300" b="1" dirty="0">
+                <a:solidFill>
+                  <a:srgbClr val="FFFFFF"/>
+                </a:solidFill>
+                <a:latin typeface="Calibri" pitchFamily="34" charset="0"/>
+                <a:ea typeface="Calibri" pitchFamily="34" charset="-122"/>
+                <a:cs typeface="Calibri" pitchFamily="34" charset="-120"/>
+              </a:rPr>
+              <a:t>階段一　基準建立（觀察期）</a:t>
+            </a:r>
+            <a:endParaRPr lang="en-US" sz="1300" dirty="0"/>
+          </a:p>
+        </p:txBody>
+      </p:sp>
+      <p:sp>
+        <p:nvSpPr>
+          <p:cNvPr id="7" name="Shape 5"/>
+          <p:cNvSpPr/>
+          <p:nvPr/>
+        </p:nvSpPr>
+        <p:spPr>
+          <a:xfrm>
+            <a:off x="502920" y="1691640"/>
+            <a:ext cx="201168" cy="201168"/>
+          </a:xfrm>
+          <a:prstGeom prst="ellipse">
+            <a:avLst/>
+          </a:prstGeom>
+          <a:solidFill>
+            <a:srgbClr val="1B4F72"/>
+          </a:solidFill>
+          <a:ln/>
+        </p:spPr>
+      </p:sp>
+      <p:sp>
+        <p:nvSpPr>
+          <p:cNvPr id="8" name="Text 6"/>
+          <p:cNvSpPr/>
+          <p:nvPr/>
+        </p:nvSpPr>
+        <p:spPr>
+          <a:xfrm>
+            <a:off x="822960" y="1664208"/>
+            <a:ext cx="3474720" cy="347472"/>
+          </a:xfrm>
+          <a:prstGeom prst="rect">
+            <a:avLst/>
+          </a:prstGeom>
+          <a:noFill/>
+          <a:ln/>
+        </p:spPr>
+        <p:txBody>
+          <a:bodyPr wrap="square" rtlCol="0" anchor="ctr"/>
+          <a:lstStyle/>
+          <a:p>
+            <a:pPr marL="0" indent="0">
+              <a:buNone/>
+            </a:pPr>
+            <a:r>
+              <a:rPr lang="en-US" sz="1200" dirty="0">
+                <a:solidFill>
+                  <a:srgbClr val="0D1B2A"/>
+                </a:solidFill>
+                <a:latin typeface="Calibri" pitchFamily="34" charset="0"/>
+                <a:ea typeface="Calibri" pitchFamily="34" charset="-122"/>
+                <a:cs typeface="Calibri" pitchFamily="34" charset="-120"/>
+              </a:rPr>
+              <a:t>部署系統於辦公 / 家庭環境</a:t>
+            </a:r>
+            <a:endParaRPr lang="en-US" sz="1200" dirty="0"/>
+          </a:p>
+        </p:txBody>
+      </p:sp>
+      <p:sp>
+        <p:nvSpPr>
+          <p:cNvPr id="9" name="Shape 7"/>
+          <p:cNvSpPr/>
+          <p:nvPr/>
+        </p:nvSpPr>
+        <p:spPr>
+          <a:xfrm>
+            <a:off x="502920" y="2148840"/>
+            <a:ext cx="201168" cy="201168"/>
+          </a:xfrm>
+          <a:prstGeom prst="ellipse">
+            <a:avLst/>
+          </a:prstGeom>
+          <a:solidFill>
+            <a:srgbClr val="1B4F72"/>
+          </a:solidFill>
+          <a:ln/>
+        </p:spPr>
+      </p:sp>
+      <p:sp>
+        <p:nvSpPr>
+          <p:cNvPr id="10" name="Text 8"/>
+          <p:cNvSpPr/>
+          <p:nvPr/>
+        </p:nvSpPr>
+        <p:spPr>
+          <a:xfrm>
+            <a:off x="822960" y="2121408"/>
+            <a:ext cx="3474720" cy="347472"/>
+          </a:xfrm>
+          <a:prstGeom prst="rect">
+            <a:avLst/>
+          </a:prstGeom>
+          <a:noFill/>
+          <a:ln/>
+        </p:spPr>
+        <p:txBody>
+          <a:bodyPr wrap="square" rtlCol="0" anchor="ctr"/>
+          <a:lstStyle/>
+          <a:p>
+            <a:pPr marL="0" indent="0">
+              <a:buNone/>
+            </a:pPr>
+            <a:r>
+              <a:rPr lang="en-US" sz="1200" dirty="0">
+                <a:solidFill>
+                  <a:srgbClr val="0D1B2A"/>
+                </a:solidFill>
+                <a:latin typeface="Calibri" pitchFamily="34" charset="0"/>
+                <a:ea typeface="Calibri" pitchFamily="34" charset="-122"/>
+                <a:cs typeface="Calibri" pitchFamily="34" charset="-120"/>
+              </a:rPr>
+              <a:t>無干預地收集電流數據</a:t>
+            </a:r>
+            <a:endParaRPr lang="en-US" sz="1200" dirty="0"/>
+          </a:p>
+        </p:txBody>
+      </p:sp>
+      <p:sp>
+        <p:nvSpPr>
+          <p:cNvPr id="11" name="Shape 9"/>
+          <p:cNvSpPr/>
+          <p:nvPr/>
+        </p:nvSpPr>
+        <p:spPr>
+          <a:xfrm>
+            <a:off x="502920" y="2606040"/>
+            <a:ext cx="201168" cy="201168"/>
+          </a:xfrm>
+          <a:prstGeom prst="ellipse">
+            <a:avLst/>
+          </a:prstGeom>
+          <a:solidFill>
+            <a:srgbClr val="1B4F72"/>
+          </a:solidFill>
+          <a:ln/>
+        </p:spPr>
+      </p:sp>
+      <p:sp>
+        <p:nvSpPr>
+          <p:cNvPr id="12" name="Text 10"/>
+          <p:cNvSpPr/>
+          <p:nvPr/>
+        </p:nvSpPr>
+        <p:spPr>
+          <a:xfrm>
+            <a:off x="822960" y="2578608"/>
+            <a:ext cx="3474720" cy="347472"/>
+          </a:xfrm>
+          <a:prstGeom prst="rect">
+            <a:avLst/>
+          </a:prstGeom>
+          <a:noFill/>
+          <a:ln/>
+        </p:spPr>
+        <p:txBody>
+          <a:bodyPr wrap="square" rtlCol="0" anchor="ctr"/>
+          <a:lstStyle/>
+          <a:p>
+            <a:pPr marL="0" indent="0">
+              <a:buNone/>
+            </a:pPr>
+            <a:r>
+              <a:rPr lang="en-US" sz="1200" dirty="0">
+                <a:solidFill>
+                  <a:srgbClr val="0D1B2A"/>
+                </a:solidFill>
+                <a:latin typeface="Calibri" pitchFamily="34" charset="0"/>
+                <a:ea typeface="Calibri" pitchFamily="34" charset="-122"/>
+                <a:cs typeface="Calibri" pitchFamily="34" charset="-120"/>
+              </a:rPr>
+              <a:t>建立空間「基準耗電模型」</a:t>
+            </a:r>
+            <a:endParaRPr lang="en-US" sz="1200" dirty="0"/>
+          </a:p>
+        </p:txBody>
+      </p:sp>
+      <p:sp>
+        <p:nvSpPr>
+          <p:cNvPr id="13" name="Shape 11"/>
+          <p:cNvSpPr/>
+          <p:nvPr/>
+        </p:nvSpPr>
+        <p:spPr>
+          <a:xfrm>
+            <a:off x="502920" y="3063240"/>
+            <a:ext cx="201168" cy="201168"/>
+          </a:xfrm>
+          <a:prstGeom prst="ellipse">
+            <a:avLst/>
+          </a:prstGeom>
+          <a:solidFill>
+            <a:srgbClr val="1B4F72"/>
+          </a:solidFill>
+          <a:ln/>
+        </p:spPr>
+      </p:sp>
+      <p:sp>
+        <p:nvSpPr>
+          <p:cNvPr id="14" name="Text 12"/>
+          <p:cNvSpPr/>
+          <p:nvPr/>
+        </p:nvSpPr>
+        <p:spPr>
+          <a:xfrm>
+            <a:off x="822960" y="3035808"/>
+            <a:ext cx="3474720" cy="347472"/>
+          </a:xfrm>
+          <a:prstGeom prst="rect">
+            <a:avLst/>
+          </a:prstGeom>
+          <a:noFill/>
+          <a:ln/>
+        </p:spPr>
+        <p:txBody>
+          <a:bodyPr wrap="square" rtlCol="0" anchor="ctr"/>
+          <a:lstStyle/>
+          <a:p>
+            <a:pPr marL="0" indent="0">
+              <a:buNone/>
+            </a:pPr>
+            <a:r>
+              <a:rPr lang="en-US" sz="1200" dirty="0">
+                <a:solidFill>
+                  <a:srgbClr val="0D1B2A"/>
+                </a:solidFill>
+                <a:latin typeface="Calibri" pitchFamily="34" charset="0"/>
+                <a:ea typeface="Calibri" pitchFamily="34" charset="-122"/>
+                <a:cs typeface="Calibri" pitchFamily="34" charset="-120"/>
+              </a:rPr>
+              <a:t>確立 Baseline 參考值</a:t>
+            </a:r>
+            <a:endParaRPr lang="en-US" sz="1200" dirty="0"/>
+          </a:p>
+        </p:txBody>
+      </p:sp>
+      <p:sp>
+        <p:nvSpPr>
+          <p:cNvPr id="15" name="Shape 13"/>
+          <p:cNvSpPr/>
+          <p:nvPr/>
+        </p:nvSpPr>
+        <p:spPr>
+          <a:xfrm>
+            <a:off x="4754880" y="1097280"/>
+            <a:ext cx="4114800" cy="2377440"/>
+          </a:xfrm>
+          <a:prstGeom prst="rect">
+            <a:avLst/>
+          </a:prstGeom>
+          <a:solidFill>
+            <a:srgbClr val="F1F5F9"/>
+          </a:solidFill>
+          <a:ln w="12700">
+            <a:solidFill>
+              <a:srgbClr val="10B981"/>
+            </a:solidFill>
+            <a:prstDash val="solid"/>
+          </a:ln>
+        </p:spPr>
+      </p:sp>
+      <p:sp>
+        <p:nvSpPr>
+          <p:cNvPr id="16" name="Shape 14"/>
+          <p:cNvSpPr/>
+          <p:nvPr/>
+        </p:nvSpPr>
+        <p:spPr>
+          <a:xfrm>
+            <a:off x="4754880" y="1097280"/>
+            <a:ext cx="4114800" cy="457200"/>
+          </a:xfrm>
+          <a:prstGeom prst="rect">
+            <a:avLst/>
+          </a:prstGeom>
+          <a:solidFill>
+            <a:srgbClr val="10B981"/>
+          </a:solidFill>
+          <a:ln/>
+        </p:spPr>
+      </p:sp>
+      <p:sp>
+        <p:nvSpPr>
+          <p:cNvPr id="17" name="Text 15"/>
+          <p:cNvSpPr/>
+          <p:nvPr/>
+        </p:nvSpPr>
+        <p:spPr>
+          <a:xfrm>
+            <a:off x="4892040" y="1097280"/>
+            <a:ext cx="3840480" cy="457200"/>
+          </a:xfrm>
+          <a:prstGeom prst="rect">
+            <a:avLst/>
+          </a:prstGeom>
+          <a:noFill/>
+          <a:ln/>
+        </p:spPr>
+        <p:txBody>
+          <a:bodyPr wrap="square" rtlCol="0" anchor="ctr"/>
+          <a:lstStyle/>
+          <a:p>
+            <a:pPr marL="0" indent="0">
+              <a:buNone/>
+            </a:pPr>
+            <a:r>
+              <a:rPr lang="en-US" sz="1300" b="1" dirty="0">
+                <a:solidFill>
+                  <a:srgbClr val="FFFFFF"/>
+                </a:solidFill>
+                <a:latin typeface="Calibri" pitchFamily="34" charset="0"/>
+                <a:ea typeface="Calibri" pitchFamily="34" charset="-122"/>
+                <a:cs typeface="Calibri" pitchFamily="34" charset="-120"/>
+              </a:rPr>
+              <a:t>階段二　介入改善（優化期）</a:t>
+            </a:r>
+            <a:endParaRPr lang="en-US" sz="1300" dirty="0"/>
+          </a:p>
+        </p:txBody>
+      </p:sp>
+      <p:sp>
+        <p:nvSpPr>
+          <p:cNvPr id="18" name="Shape 16"/>
+          <p:cNvSpPr/>
+          <p:nvPr/>
+        </p:nvSpPr>
+        <p:spPr>
+          <a:xfrm>
+            <a:off x="4937760" y="1691640"/>
+            <a:ext cx="201168" cy="201168"/>
+          </a:xfrm>
+          <a:prstGeom prst="ellipse">
+            <a:avLst/>
+          </a:prstGeom>
+          <a:solidFill>
+            <a:srgbClr val="10B981"/>
+          </a:solidFill>
+          <a:ln/>
+        </p:spPr>
+      </p:sp>
+      <p:sp>
+        <p:nvSpPr>
+          <p:cNvPr id="19" name="Text 17"/>
+          <p:cNvSpPr/>
+          <p:nvPr/>
+        </p:nvSpPr>
+        <p:spPr>
+          <a:xfrm>
+            <a:off x="5257800" y="1664208"/>
+            <a:ext cx="3474720" cy="347472"/>
+          </a:xfrm>
+          <a:prstGeom prst="rect">
+            <a:avLst/>
+          </a:prstGeom>
+          <a:noFill/>
+          <a:ln/>
+        </p:spPr>
+        <p:txBody>
+          <a:bodyPr wrap="square" rtlCol="0" anchor="ctr"/>
+          <a:lstStyle/>
+          <a:p>
+            <a:pPr marL="0" indent="0">
+              <a:buNone/>
+            </a:pPr>
+            <a:r>
+              <a:rPr lang="en-US" sz="1200" dirty="0">
+                <a:solidFill>
+                  <a:srgbClr val="0D1B2A"/>
+                </a:solidFill>
+                <a:latin typeface="Calibri" pitchFamily="34" charset="0"/>
+                <a:ea typeface="Calibri" pitchFamily="34" charset="-122"/>
+                <a:cs typeface="Calibri" pitchFamily="34" charset="-120"/>
+              </a:rPr>
+              <a:t>根據數據進行用電洞察</a:t>
+            </a:r>
+            <a:endParaRPr lang="en-US" sz="1200" dirty="0"/>
+          </a:p>
+        </p:txBody>
+      </p:sp>
+      <p:sp>
+        <p:nvSpPr>
+          <p:cNvPr id="20" name="Shape 18"/>
+          <p:cNvSpPr/>
+          <p:nvPr/>
+        </p:nvSpPr>
+        <p:spPr>
+          <a:xfrm>
+            <a:off x="4937760" y="2148840"/>
+            <a:ext cx="201168" cy="201168"/>
+          </a:xfrm>
+          <a:prstGeom prst="ellipse">
+            <a:avLst/>
+          </a:prstGeom>
+          <a:solidFill>
+            <a:srgbClr val="10B981"/>
+          </a:solidFill>
+          <a:ln/>
+        </p:spPr>
+      </p:sp>
+      <p:sp>
+        <p:nvSpPr>
+          <p:cNvPr id="21" name="Text 19"/>
+          <p:cNvSpPr/>
+          <p:nvPr/>
+        </p:nvSpPr>
+        <p:spPr>
+          <a:xfrm>
+            <a:off x="5257800" y="2121408"/>
+            <a:ext cx="3474720" cy="347472"/>
+          </a:xfrm>
+          <a:prstGeom prst="rect">
+            <a:avLst/>
+          </a:prstGeom>
+          <a:noFill/>
+          <a:ln/>
+        </p:spPr>
+        <p:txBody>
+          <a:bodyPr wrap="square" rtlCol="0" anchor="ctr"/>
+          <a:lstStyle/>
+          <a:p>
+            <a:pPr marL="0" indent="0">
+              <a:buNone/>
+            </a:pPr>
+            <a:r>
+              <a:rPr lang="en-US" sz="1200" dirty="0">
+                <a:solidFill>
+                  <a:srgbClr val="0D1B2A"/>
+                </a:solidFill>
+                <a:latin typeface="Calibri" pitchFamily="34" charset="0"/>
+                <a:ea typeface="Calibri" pitchFamily="34" charset="-122"/>
+                <a:cs typeface="Calibri" pitchFamily="34" charset="-120"/>
+              </a:rPr>
+              <a:t>非上班時段繼電器切斷待機設備</a:t>
+            </a:r>
+            <a:endParaRPr lang="en-US" sz="1200" dirty="0"/>
+          </a:p>
+        </p:txBody>
+      </p:sp>
+      <p:sp>
+        <p:nvSpPr>
+          <p:cNvPr id="22" name="Shape 20"/>
+          <p:cNvSpPr/>
+          <p:nvPr/>
+        </p:nvSpPr>
+        <p:spPr>
+          <a:xfrm>
+            <a:off x="4937760" y="2606040"/>
+            <a:ext cx="201168" cy="201168"/>
+          </a:xfrm>
+          <a:prstGeom prst="ellipse">
+            <a:avLst/>
+          </a:prstGeom>
+          <a:solidFill>
+            <a:srgbClr val="10B981"/>
+          </a:solidFill>
+          <a:ln/>
+        </p:spPr>
+      </p:sp>
+      <p:sp>
+        <p:nvSpPr>
+          <p:cNvPr id="23" name="Text 21"/>
+          <p:cNvSpPr/>
+          <p:nvPr/>
+        </p:nvSpPr>
+        <p:spPr>
+          <a:xfrm>
+            <a:off x="5257800" y="2578608"/>
+            <a:ext cx="3474720" cy="347472"/>
+          </a:xfrm>
+          <a:prstGeom prst="rect">
+            <a:avLst/>
+          </a:prstGeom>
+          <a:noFill/>
+          <a:ln/>
+        </p:spPr>
+        <p:txBody>
+          <a:bodyPr wrap="square" rtlCol="0" anchor="ctr"/>
+          <a:lstStyle/>
+          <a:p>
+            <a:pPr marL="0" indent="0">
+              <a:buNone/>
+            </a:pPr>
+            <a:r>
+              <a:rPr lang="en-US" sz="1200" dirty="0">
+                <a:solidFill>
+                  <a:srgbClr val="0D1B2A"/>
+                </a:solidFill>
+                <a:latin typeface="Calibri" pitchFamily="34" charset="0"/>
+                <a:ea typeface="Calibri" pitchFamily="34" charset="-122"/>
+                <a:cs typeface="Calibri" pitchFamily="34" charset="-120"/>
+              </a:rPr>
+              <a:t>實驗結束對比前後兩週用電量</a:t>
+            </a:r>
+            <a:endParaRPr lang="en-US" sz="1200" dirty="0"/>
+          </a:p>
+        </p:txBody>
+      </p:sp>
+      <p:sp>
+        <p:nvSpPr>
+          <p:cNvPr id="24" name="Shape 22"/>
+          <p:cNvSpPr/>
+          <p:nvPr/>
+        </p:nvSpPr>
+        <p:spPr>
+          <a:xfrm>
+            <a:off x="4937760" y="3063240"/>
+            <a:ext cx="201168" cy="201168"/>
+          </a:xfrm>
+          <a:prstGeom prst="ellipse">
+            <a:avLst/>
+          </a:prstGeom>
+          <a:solidFill>
+            <a:srgbClr val="10B981"/>
+          </a:solidFill>
+          <a:ln/>
+        </p:spPr>
+      </p:sp>
+      <p:sp>
+        <p:nvSpPr>
+          <p:cNvPr id="25" name="Text 23"/>
+          <p:cNvSpPr/>
+          <p:nvPr/>
+        </p:nvSpPr>
+        <p:spPr>
+          <a:xfrm>
+            <a:off x="5257800" y="3035808"/>
+            <a:ext cx="3474720" cy="347472"/>
+          </a:xfrm>
+          <a:prstGeom prst="rect">
+            <a:avLst/>
+          </a:prstGeom>
+          <a:noFill/>
+          <a:ln/>
+        </p:spPr>
+        <p:txBody>
+          <a:bodyPr wrap="square" rtlCol="0" anchor="ctr"/>
+          <a:lstStyle/>
+          <a:p>
+            <a:pPr marL="0" indent="0">
+              <a:buNone/>
+            </a:pPr>
+            <a:r>
+              <a:rPr lang="en-US" sz="1200" dirty="0">
+                <a:solidFill>
+                  <a:srgbClr val="0D1B2A"/>
+                </a:solidFill>
+                <a:latin typeface="Calibri" pitchFamily="34" charset="0"/>
+                <a:ea typeface="Calibri" pitchFamily="34" charset="-122"/>
+                <a:cs typeface="Calibri" pitchFamily="34" charset="-120"/>
+              </a:rPr>
+              <a:t>計算節電率與成效評估</a:t>
+            </a:r>
+            <a:endParaRPr lang="en-US" sz="1200" dirty="0"/>
+          </a:p>
+        </p:txBody>
+      </p:sp>
+      <p:sp>
+        <p:nvSpPr>
+          <p:cNvPr id="26" name="Text 24"/>
+          <p:cNvSpPr/>
+          <p:nvPr/>
+        </p:nvSpPr>
+        <p:spPr>
+          <a:xfrm>
+            <a:off x="320040" y="3611880"/>
+            <a:ext cx="8503920" cy="365760"/>
+          </a:xfrm>
+          <a:prstGeom prst="rect">
+            <a:avLst/>
+          </a:prstGeom>
+          <a:noFill/>
+          <a:ln/>
+        </p:spPr>
+        <p:txBody>
+          <a:bodyPr wrap="square" rtlCol="0" anchor="ctr"/>
+          <a:lstStyle/>
+          <a:p>
+            <a:pPr marL="0" indent="0">
+              <a:buNone/>
+            </a:pPr>
+            <a:r>
+              <a:rPr lang="en-US" sz="1400" b="1" dirty="0">
+                <a:solidFill>
+                  <a:srgbClr val="0D1B2A"/>
+                </a:solidFill>
+                <a:latin typeface="Calibri" pitchFamily="34" charset="0"/>
+                <a:ea typeface="Calibri" pitchFamily="34" charset="-122"/>
+                <a:cs typeface="Calibri" pitchFamily="34" charset="-120"/>
+              </a:rPr>
+              <a:t>精度驗證目標（vs. 數位萬用表）</a:t>
+            </a:r>
+            <a:endParaRPr lang="en-US" sz="1400" dirty="0"/>
+          </a:p>
+        </p:txBody>
+      </p:sp>
+      <p:graphicFrame>
+        <p:nvGraphicFramePr>
+          <p:cNvPr id="27" name="Chart 0"/>
+          <p:cNvGraphicFramePr/>
+          <p:nvPr/>
+        </p:nvGraphicFramePr>
+        <p:xfrm>
+          <a:off x="320040" y="3977640"/>
+          <a:ext cx="8503920" cy="1005840"/>
+        </p:xfrm>
+        <a:graphic>
+          <a:graphicData uri="http://schemas.openxmlformats.org/drawingml/2006/chart">
+            <c:chart xmlns:c="http://schemas.openxmlformats.org/drawingml/2006/chart" xmlns:r="http://schemas.openxmlformats.org/officeDocument/2006/relationships" r:id="rId3"/>
+          </a:graphicData>
+        </a:graphic>
+      </p:graphicFrame>
+    </p:spTree>
+  </p:cSld>
+  <p:clrMapOvr>
+    <a:masterClrMapping/>
+  </p:clrMapOvr>
+</p:sld>
+</file>
+
+<file path=ppt/slides/slide12.xml><?xml version="1.0" encoding="utf-8"?>
+<p:sld xmlns:a="http://schemas.openxmlformats.org/drawingml/2006/main" xmlns:r="http://schemas.openxmlformats.org/officeDocument/2006/relationships" xmlns:p="http://schemas.openxmlformats.org/presentationml/2006/main">
   <p:cSld>
     <p:spTree>
       <p:nvGrpSpPr>
@@ -2308,7 +4502,7 @@
 </p:sld>
 </file>
 
-<file path=ppt/slides/slide11.xml><?xml version="1.0" encoding="utf-8"?>
+<file path=ppt/slides/slide13.xml><?xml version="1.0" encoding="utf-8"?>
 <p:sld xmlns:a="http://schemas.openxmlformats.org/drawingml/2006/main" xmlns:r="http://schemas.openxmlformats.org/officeDocument/2006/relationships" xmlns:p="http://schemas.openxmlformats.org/presentationml/2006/main">
   <p:cSld name="Slide 9">
     <p:bg>
@@ -3162,7 +5356,7 @@
 </p:sld>
 </file>
 
-<file path=ppt/slides/slide12.xml><?xml version="1.0" encoding="utf-8"?>
+<file path=ppt/slides/slide14.xml><?xml version="1.0" encoding="utf-8"?>
 <p:sld xmlns:a="http://schemas.openxmlformats.org/drawingml/2006/main" xmlns:r="http://schemas.openxmlformats.org/officeDocument/2006/relationships" xmlns:p="http://schemas.openxmlformats.org/presentationml/2006/main">
   <p:cSld name="Slide 10">
     <p:bg>
@@ -5984,6 +8178,142 @@
 
 <file path=ppt/slides/slide4.xml><?xml version="1.0" encoding="utf-8"?>
 <p:sld xmlns:a="http://schemas.openxmlformats.org/drawingml/2006/main" xmlns:r="http://schemas.openxmlformats.org/officeDocument/2006/relationships" xmlns:p="http://schemas.openxmlformats.org/presentationml/2006/main">
+  <p:cSld>
+    <p:spTree>
+      <p:nvGrpSpPr>
+        <p:cNvPr id="1" name=""/>
+        <p:cNvGrpSpPr/>
+        <p:nvPr/>
+      </p:nvGrpSpPr>
+      <p:grpSpPr>
+        <a:xfrm>
+          <a:off x="0" y="0"/>
+          <a:ext cx="0" cy="0"/>
+          <a:chOff x="0" y="0"/>
+          <a:chExt cx="0" cy="0"/>
+        </a:xfrm>
+      </p:grpSpPr>
+      <p:sp>
+        <p:nvSpPr>
+          <p:cNvPr id="2" name="Text 1">
+            <a:extLst>
+              <a:ext uri="{FF2B5EF4-FFF2-40B4-BE49-F238E27FC236}">
+                <a16:creationId xmlns:a16="http://schemas.microsoft.com/office/drawing/2014/main" id="{628E42E3-C177-6AB9-C13A-35847926CEAC}"/>
+              </a:ext>
+            </a:extLst>
+          </p:cNvPr>
+          <p:cNvSpPr/>
+          <p:nvPr/>
+        </p:nvSpPr>
+        <p:spPr>
+          <a:xfrm>
+            <a:off x="457200" y="91440"/>
+            <a:ext cx="8229600" cy="777240"/>
+          </a:xfrm>
+          <a:prstGeom prst="rect">
+            <a:avLst/>
+          </a:prstGeom>
+          <a:noFill/>
+          <a:ln/>
+        </p:spPr>
+        <p:txBody>
+          <a:bodyPr wrap="square" rtlCol="0" anchor="ctr"/>
+          <a:lstStyle/>
+          <a:p>
+            <a:pPr marL="0" indent="0">
+              <a:buNone/>
+            </a:pPr>
+            <a:r>
+              <a:rPr lang="en-US" sz="2600" b="1" dirty="0">
+                <a:latin typeface="Calibri" pitchFamily="34" charset="0"/>
+                <a:ea typeface="Calibri" pitchFamily="34" charset="-122"/>
+                <a:cs typeface="Calibri" pitchFamily="34" charset="-120"/>
+              </a:rPr>
+              <a:t>01　</a:t>
+            </a:r>
+            <a:r>
+              <a:rPr lang="en-US" sz="2600" b="1" dirty="0" err="1">
+                <a:latin typeface="Calibri" pitchFamily="34" charset="0"/>
+                <a:ea typeface="Calibri" pitchFamily="34" charset="-122"/>
+                <a:cs typeface="Calibri" pitchFamily="34" charset="-120"/>
+              </a:rPr>
+              <a:t>動機與問題背景</a:t>
+            </a:r>
+            <a:r>
+              <a:rPr lang="zh-TW" altLang="en-US" sz="2600" b="1" dirty="0">
+                <a:latin typeface="Calibri" pitchFamily="34" charset="0"/>
+                <a:ea typeface="Calibri" pitchFamily="34" charset="-122"/>
+                <a:cs typeface="Calibri" pitchFamily="34" charset="-120"/>
+              </a:rPr>
+              <a:t> </a:t>
+            </a:r>
+            <a:r>
+              <a:rPr lang="en-US" altLang="zh-TW" sz="2600" b="1" dirty="0">
+                <a:latin typeface="Calibri" pitchFamily="34" charset="0"/>
+                <a:ea typeface="Calibri" pitchFamily="34" charset="-122"/>
+                <a:cs typeface="Calibri" pitchFamily="34" charset="-120"/>
+              </a:rPr>
+              <a:t>—</a:t>
+            </a:r>
+            <a:r>
+              <a:rPr lang="zh-TW" altLang="en-US" sz="2600" b="1" dirty="0">
+                <a:latin typeface="Calibri" pitchFamily="34" charset="0"/>
+                <a:ea typeface="Calibri" pitchFamily="34" charset="-122"/>
+                <a:cs typeface="Calibri" pitchFamily="34" charset="-120"/>
+              </a:rPr>
+              <a:t> 相關文獻彙整表</a:t>
+            </a:r>
+            <a:endParaRPr lang="en-US" sz="2600" dirty="0">
+              <a:latin typeface="+mj-lt"/>
+            </a:endParaRPr>
+          </a:p>
+        </p:txBody>
+      </p:sp>
+      <p:pic>
+        <p:nvPicPr>
+          <p:cNvPr id="6" name="圖片 5">
+            <a:extLst>
+              <a:ext uri="{FF2B5EF4-FFF2-40B4-BE49-F238E27FC236}">
+                <a16:creationId xmlns:a16="http://schemas.microsoft.com/office/drawing/2014/main" id="{12B9D032-BA87-811D-490F-5470021ED49D}"/>
+              </a:ext>
+            </a:extLst>
+          </p:cNvPr>
+          <p:cNvPicPr>
+            <a:picLocks noChangeAspect="1"/>
+          </p:cNvPicPr>
+          <p:nvPr/>
+        </p:nvPicPr>
+        <p:blipFill>
+          <a:blip r:embed="rId2"/>
+          <a:stretch>
+            <a:fillRect/>
+          </a:stretch>
+        </p:blipFill>
+        <p:spPr>
+          <a:xfrm>
+            <a:off x="228600" y="928392"/>
+            <a:ext cx="8686800" cy="3508786"/>
+          </a:xfrm>
+          <a:prstGeom prst="rect">
+            <a:avLst/>
+          </a:prstGeom>
+        </p:spPr>
+      </p:pic>
+    </p:spTree>
+    <p:extLst>
+      <p:ext uri="{BB962C8B-B14F-4D97-AF65-F5344CB8AC3E}">
+        <p14:creationId xmlns:p14="http://schemas.microsoft.com/office/powerpoint/2010/main" val="3935668480"/>
+      </p:ext>
+    </p:extLst>
+  </p:cSld>
+  <p:clrMapOvr>
+    <a:masterClrMapping/>
+  </p:clrMapOvr>
+</p:sld>
+</file>
+
+<file path=ppt/slides/slide5.xml><?xml version="1.0" encoding="utf-8"?>
+<p:sld xmlns:a="http://schemas.openxmlformats.org/drawingml/2006/main" xmlns:r="http://schemas.openxmlformats.org/officeDocument/2006/relationships" xmlns:p="http://schemas.openxmlformats.org/presentationml/2006/main">
   <p:cSld name="Slide 4">
     <p:bg>
       <p:bgPr>
@@ -6566,7 +8896,141 @@
 </p:sld>
 </file>
 
-<file path=ppt/slides/slide5.xml><?xml version="1.0" encoding="utf-8"?>
+<file path=ppt/slides/slide6.xml><?xml version="1.0" encoding="utf-8"?>
+<p:sld xmlns:a="http://schemas.openxmlformats.org/drawingml/2006/main" xmlns:r="http://schemas.openxmlformats.org/officeDocument/2006/relationships" xmlns:p="http://schemas.openxmlformats.org/presentationml/2006/main">
+  <p:cSld>
+    <p:spTree>
+      <p:nvGrpSpPr>
+        <p:cNvPr id="1" name=""/>
+        <p:cNvGrpSpPr/>
+        <p:nvPr/>
+      </p:nvGrpSpPr>
+      <p:grpSpPr>
+        <a:xfrm>
+          <a:off x="0" y="0"/>
+          <a:ext cx="0" cy="0"/>
+          <a:chOff x="0" y="0"/>
+          <a:chExt cx="0" cy="0"/>
+        </a:xfrm>
+      </p:grpSpPr>
+      <p:sp>
+        <p:nvSpPr>
+          <p:cNvPr id="2" name="Text 1">
+            <a:extLst>
+              <a:ext uri="{FF2B5EF4-FFF2-40B4-BE49-F238E27FC236}">
+                <a16:creationId xmlns:a16="http://schemas.microsoft.com/office/drawing/2014/main" id="{12B93330-CDDA-0FDA-E94C-3344D7DB2C13}"/>
+              </a:ext>
+            </a:extLst>
+          </p:cNvPr>
+          <p:cNvSpPr/>
+          <p:nvPr/>
+        </p:nvSpPr>
+        <p:spPr>
+          <a:xfrm>
+            <a:off x="457200" y="91440"/>
+            <a:ext cx="8229600" cy="777240"/>
+          </a:xfrm>
+          <a:prstGeom prst="rect">
+            <a:avLst/>
+          </a:prstGeom>
+          <a:noFill/>
+          <a:ln/>
+        </p:spPr>
+        <p:txBody>
+          <a:bodyPr wrap="square" rtlCol="0" anchor="ctr"/>
+          <a:lstStyle/>
+          <a:p>
+            <a:pPr marL="0" indent="0">
+              <a:buNone/>
+            </a:pPr>
+            <a:r>
+              <a:rPr lang="en-US" sz="2600" b="1" dirty="0">
+                <a:latin typeface="Calibri" pitchFamily="34" charset="0"/>
+                <a:ea typeface="Calibri" pitchFamily="34" charset="-122"/>
+                <a:cs typeface="Calibri" pitchFamily="34" charset="-120"/>
+              </a:rPr>
+              <a:t>02　</a:t>
+            </a:r>
+            <a:r>
+              <a:rPr lang="en-US" sz="2600" b="1" dirty="0" err="1">
+                <a:latin typeface="Calibri" pitchFamily="34" charset="0"/>
+                <a:ea typeface="Calibri" pitchFamily="34" charset="-122"/>
+                <a:cs typeface="Calibri" pitchFamily="34" charset="-120"/>
+              </a:rPr>
+              <a:t>主要技術挑戰</a:t>
+            </a:r>
+            <a:r>
+              <a:rPr lang="zh-TW" altLang="en-US" sz="2600" b="1" dirty="0">
+                <a:latin typeface="Calibri" pitchFamily="34" charset="0"/>
+                <a:ea typeface="Calibri" pitchFamily="34" charset="-122"/>
+                <a:cs typeface="Calibri" pitchFamily="34" charset="-120"/>
+              </a:rPr>
+              <a:t> </a:t>
+            </a:r>
+            <a:r>
+              <a:rPr lang="en-US" altLang="zh-TW" sz="2600" b="1" dirty="0">
+                <a:latin typeface="Calibri" pitchFamily="34" charset="0"/>
+                <a:ea typeface="Calibri" pitchFamily="34" charset="-122"/>
+                <a:cs typeface="Calibri" pitchFamily="34" charset="-120"/>
+              </a:rPr>
+              <a:t>—</a:t>
+            </a:r>
+            <a:r>
+              <a:rPr lang="zh-TW" altLang="en-US" sz="2600" b="1" dirty="0">
+                <a:latin typeface="Calibri" pitchFamily="34" charset="0"/>
+                <a:ea typeface="Calibri" pitchFamily="34" charset="-122"/>
+                <a:cs typeface="Calibri" pitchFamily="34" charset="-120"/>
+              </a:rPr>
+              <a:t> 相關文獻彙整表</a:t>
+            </a:r>
+            <a:endParaRPr lang="en-US" sz="2600" dirty="0"/>
+          </a:p>
+        </p:txBody>
+      </p:sp>
+      <p:pic>
+        <p:nvPicPr>
+          <p:cNvPr id="4" name="圖片 3">
+            <a:extLst>
+              <a:ext uri="{FF2B5EF4-FFF2-40B4-BE49-F238E27FC236}">
+                <a16:creationId xmlns:a16="http://schemas.microsoft.com/office/drawing/2014/main" id="{34E27288-486B-137E-E85D-E4723C65AC69}"/>
+              </a:ext>
+            </a:extLst>
+          </p:cNvPr>
+          <p:cNvPicPr>
+            <a:picLocks noChangeAspect="1"/>
+          </p:cNvPicPr>
+          <p:nvPr/>
+        </p:nvPicPr>
+        <p:blipFill>
+          <a:blip r:embed="rId2"/>
+          <a:stretch>
+            <a:fillRect/>
+          </a:stretch>
+        </p:blipFill>
+        <p:spPr>
+          <a:xfrm>
+            <a:off x="192677" y="1013226"/>
+            <a:ext cx="8758646" cy="3117048"/>
+          </a:xfrm>
+          <a:prstGeom prst="rect">
+            <a:avLst/>
+          </a:prstGeom>
+        </p:spPr>
+      </p:pic>
+    </p:spTree>
+    <p:extLst>
+      <p:ext uri="{BB962C8B-B14F-4D97-AF65-F5344CB8AC3E}">
+        <p14:creationId xmlns:p14="http://schemas.microsoft.com/office/powerpoint/2010/main" val="301001812"/>
+      </p:ext>
+    </p:extLst>
+  </p:cSld>
+  <p:clrMapOvr>
+    <a:masterClrMapping/>
+  </p:clrMapOvr>
+</p:sld>
+</file>
+
+<file path=ppt/slides/slide7.xml><?xml version="1.0" encoding="utf-8"?>
 <p:sld xmlns:a="http://schemas.openxmlformats.org/drawingml/2006/main" xmlns:r="http://schemas.openxmlformats.org/officeDocument/2006/relationships" xmlns:p="http://schemas.openxmlformats.org/presentationml/2006/main">
   <p:cSld name="Slide 5">
     <p:bg>
@@ -7802,7 +10266,7 @@
 </p:sld>
 </file>
 
-<file path=ppt/slides/slide6.xml><?xml version="1.0" encoding="utf-8"?>
+<file path=ppt/slides/slide8.xml><?xml version="1.0" encoding="utf-8"?>
 <p:sld xmlns:a="http://schemas.openxmlformats.org/drawingml/2006/main" xmlns:r="http://schemas.openxmlformats.org/officeDocument/2006/relationships" xmlns:p="http://schemas.openxmlformats.org/presentationml/2006/main">
   <p:cSld name="Slide 6">
     <p:bg>
@@ -8868,7 +11332,7 @@
 </p:sld>
 </file>
 
-<file path=ppt/slides/slide7.xml><?xml version="1.0" encoding="utf-8"?>
+<file path=ppt/slides/slide9.xml><?xml version="1.0" encoding="utf-8"?>
 <p:sld xmlns:a="http://schemas.openxmlformats.org/drawingml/2006/main" xmlns:r="http://schemas.openxmlformats.org/officeDocument/2006/relationships" xmlns:p="http://schemas.openxmlformats.org/presentationml/2006/main">
   <p:cSld>
     <p:spTree>
@@ -8988,2198 +11452,6 @@
         <p14:creationId xmlns:p14="http://schemas.microsoft.com/office/powerpoint/2010/main" val="2313212230"/>
       </p:ext>
     </p:extLst>
-  </p:cSld>
-  <p:clrMapOvr>
-    <a:masterClrMapping/>
-  </p:clrMapOvr>
-</p:sld>
-</file>
-
-<file path=ppt/slides/slide8.xml><?xml version="1.0" encoding="utf-8"?>
-<p:sld xmlns:a="http://schemas.openxmlformats.org/drawingml/2006/main" xmlns:r="http://schemas.openxmlformats.org/officeDocument/2006/relationships" xmlns:p="http://schemas.openxmlformats.org/presentationml/2006/main">
-  <p:cSld name="Slide 7">
-    <p:bg>
-      <p:bgPr>
-        <a:solidFill>
-          <a:srgbClr val="FFFFFF"/>
-        </a:solidFill>
-        <a:effectLst/>
-      </p:bgPr>
-    </p:bg>
-    <p:spTree>
-      <p:nvGrpSpPr>
-        <p:cNvPr id="1" name=""/>
-        <p:cNvGrpSpPr/>
-        <p:nvPr/>
-      </p:nvGrpSpPr>
-      <p:grpSpPr>
-        <a:xfrm>
-          <a:off x="0" y="0"/>
-          <a:ext cx="0" cy="0"/>
-          <a:chOff x="0" y="0"/>
-          <a:chExt cx="0" cy="0"/>
-        </a:xfrm>
-      </p:grpSpPr>
-      <p:sp>
-        <p:nvSpPr>
-          <p:cNvPr id="2" name="Shape 0"/>
-          <p:cNvSpPr/>
-          <p:nvPr/>
-        </p:nvSpPr>
-        <p:spPr>
-          <a:xfrm>
-            <a:off x="0" y="0"/>
-            <a:ext cx="9144000" cy="960120"/>
-          </a:xfrm>
-          <a:prstGeom prst="rect">
-            <a:avLst/>
-          </a:prstGeom>
-          <a:solidFill>
-            <a:srgbClr val="0D1B2A"/>
-          </a:solidFill>
-          <a:ln/>
-        </p:spPr>
-      </p:sp>
-      <p:sp>
-        <p:nvSpPr>
-          <p:cNvPr id="3" name="Text 1"/>
-          <p:cNvSpPr/>
-          <p:nvPr/>
-        </p:nvSpPr>
-        <p:spPr>
-          <a:xfrm>
-            <a:off x="457200" y="91440"/>
-            <a:ext cx="8229600" cy="777240"/>
-          </a:xfrm>
-          <a:prstGeom prst="rect">
-            <a:avLst/>
-          </a:prstGeom>
-          <a:noFill/>
-          <a:ln/>
-        </p:spPr>
-        <p:txBody>
-          <a:bodyPr wrap="square" rtlCol="0" anchor="ctr"/>
-          <a:lstStyle/>
-          <a:p>
-            <a:pPr marL="0" indent="0">
-              <a:buNone/>
-            </a:pPr>
-            <a:r>
-              <a:rPr lang="en-US" sz="2600" b="1" dirty="0">
-                <a:solidFill>
-                  <a:srgbClr val="FFFFFF"/>
-                </a:solidFill>
-                <a:latin typeface="Calibri" pitchFamily="34" charset="0"/>
-                <a:ea typeface="Calibri" pitchFamily="34" charset="-122"/>
-                <a:cs typeface="Calibri" pitchFamily="34" charset="-120"/>
-              </a:rPr>
-              <a:t>04　核心軟體演算法</a:t>
-            </a:r>
-            <a:endParaRPr lang="en-US" sz="2600" dirty="0"/>
-          </a:p>
-        </p:txBody>
-      </p:sp>
-      <p:sp>
-        <p:nvSpPr>
-          <p:cNvPr id="4" name="Shape 2"/>
-          <p:cNvSpPr/>
-          <p:nvPr/>
-        </p:nvSpPr>
-        <p:spPr>
-          <a:xfrm>
-            <a:off x="320040" y="1051560"/>
-            <a:ext cx="4023360" cy="1828800"/>
-          </a:xfrm>
-          <a:prstGeom prst="rect">
-            <a:avLst/>
-          </a:prstGeom>
-          <a:solidFill>
-            <a:srgbClr val="E8F4F8"/>
-          </a:solidFill>
-          <a:ln w="12700">
-            <a:solidFill>
-              <a:srgbClr val="00A8CC"/>
-            </a:solidFill>
-            <a:prstDash val="solid"/>
-          </a:ln>
-        </p:spPr>
-      </p:sp>
-      <p:sp>
-        <p:nvSpPr>
-          <p:cNvPr id="5" name="Shape 3"/>
-          <p:cNvSpPr/>
-          <p:nvPr/>
-        </p:nvSpPr>
-        <p:spPr>
-          <a:xfrm>
-            <a:off x="320040" y="1051560"/>
-            <a:ext cx="4023360" cy="365760"/>
-          </a:xfrm>
-          <a:prstGeom prst="rect">
-            <a:avLst/>
-          </a:prstGeom>
-          <a:solidFill>
-            <a:srgbClr val="00A8CC"/>
-          </a:solidFill>
-          <a:ln/>
-        </p:spPr>
-      </p:sp>
-      <p:sp>
-        <p:nvSpPr>
-          <p:cNvPr id="6" name="Text 4"/>
-          <p:cNvSpPr/>
-          <p:nvPr/>
-        </p:nvSpPr>
-        <p:spPr>
-          <a:xfrm>
-            <a:off x="365760" y="1051560"/>
-            <a:ext cx="3931920" cy="365760"/>
-          </a:xfrm>
-          <a:prstGeom prst="rect">
-            <a:avLst/>
-          </a:prstGeom>
-          <a:noFill/>
-          <a:ln/>
-        </p:spPr>
-        <p:txBody>
-          <a:bodyPr wrap="square" rtlCol="0" anchor="ctr"/>
-          <a:lstStyle/>
-          <a:p>
-            <a:pPr marL="0" indent="0">
-              <a:buNone/>
-            </a:pPr>
-            <a:r>
-              <a:rPr lang="en-US" sz="1200" b="1" dirty="0">
-                <a:solidFill>
-                  <a:srgbClr val="FFFFFF"/>
-                </a:solidFill>
-                <a:latin typeface="Calibri" pitchFamily="34" charset="0"/>
-                <a:ea typeface="Calibri" pitchFamily="34" charset="-122"/>
-                <a:cs typeface="Calibri" pitchFamily="34" charset="-120"/>
-              </a:rPr>
-              <a:t>數位高通濾波器（Digital HPF）</a:t>
-            </a:r>
-            <a:endParaRPr lang="en-US" sz="1200" dirty="0"/>
-          </a:p>
-        </p:txBody>
-      </p:sp>
-      <p:sp>
-        <p:nvSpPr>
-          <p:cNvPr id="7" name="Text 5"/>
-          <p:cNvSpPr/>
-          <p:nvPr/>
-        </p:nvSpPr>
-        <p:spPr>
-          <a:xfrm>
-            <a:off x="411480" y="1508760"/>
-            <a:ext cx="3840480" cy="457200"/>
-          </a:xfrm>
-          <a:prstGeom prst="rect">
-            <a:avLst/>
-          </a:prstGeom>
-          <a:noFill/>
-          <a:ln/>
-        </p:spPr>
-        <p:txBody>
-          <a:bodyPr wrap="square" rtlCol="0" anchor="ctr"/>
-          <a:lstStyle/>
-          <a:p>
-            <a:pPr marL="0" indent="0">
-              <a:buNone/>
-            </a:pPr>
-            <a:r>
-              <a:rPr lang="en-US" sz="1300" b="1" dirty="0">
-                <a:solidFill>
-                  <a:srgbClr val="0D1B2A"/>
-                </a:solidFill>
-                <a:latin typeface="Consolas" pitchFamily="34" charset="0"/>
-                <a:ea typeface="Consolas" pitchFamily="34" charset="-122"/>
-                <a:cs typeface="Consolas" pitchFamily="34" charset="-120"/>
-              </a:rPr>
-              <a:t>y[n] = 0.9961 × (y[n−1] + x[n] − x[n−1])</a:t>
-            </a:r>
-            <a:endParaRPr lang="en-US" sz="1300" dirty="0"/>
-          </a:p>
-        </p:txBody>
-      </p:sp>
-      <p:sp>
-        <p:nvSpPr>
-          <p:cNvPr id="8" name="Text 6"/>
-          <p:cNvSpPr/>
-          <p:nvPr/>
-        </p:nvSpPr>
-        <p:spPr>
-          <a:xfrm>
-            <a:off x="411480" y="2011680"/>
-            <a:ext cx="3840480" cy="777240"/>
-          </a:xfrm>
-          <a:prstGeom prst="rect">
-            <a:avLst/>
-          </a:prstGeom>
-          <a:noFill/>
-          <a:ln/>
-        </p:spPr>
-        <p:txBody>
-          <a:bodyPr wrap="square" rtlCol="0" anchor="ctr"/>
-          <a:lstStyle/>
-          <a:p>
-            <a:pPr marL="0" indent="0">
-              <a:buNone/>
-            </a:pPr>
-            <a:r>
-              <a:rPr lang="en-US" sz="1100" b="1" dirty="0">
-                <a:solidFill>
-                  <a:srgbClr val="0D1B2A"/>
-                </a:solidFill>
-                <a:latin typeface="Calibri" pitchFamily="34" charset="0"/>
-                <a:ea typeface="Calibri" pitchFamily="34" charset="-122"/>
-                <a:cs typeface="Calibri" pitchFamily="34" charset="-120"/>
-              </a:rPr>
-              <a:t>x[n]</a:t>
-            </a:r>
-            <a:r>
-              <a:rPr lang="en-US" sz="1100" dirty="0">
-                <a:solidFill>
-                  <a:srgbClr val="0D1B2A"/>
-                </a:solidFill>
-                <a:latin typeface="Calibri" pitchFamily="34" charset="0"/>
-                <a:ea typeface="Calibri" pitchFamily="34" charset="-122"/>
-                <a:cs typeface="Calibri" pitchFamily="34" charset="-120"/>
-              </a:rPr>
-              <a:t>：當前 ADC 採樣毫伏值
-</a:t>
-            </a:r>
-            <a:r>
-              <a:rPr lang="en-US" sz="1100" b="1" dirty="0">
-                <a:solidFill>
-                  <a:srgbClr val="0D1B2A"/>
-                </a:solidFill>
-                <a:latin typeface="Calibri" pitchFamily="34" charset="0"/>
-                <a:ea typeface="Calibri" pitchFamily="34" charset="-122"/>
-                <a:cs typeface="Calibri" pitchFamily="34" charset="-120"/>
-              </a:rPr>
-              <a:t>y[n]</a:t>
-            </a:r>
-            <a:r>
-              <a:rPr lang="en-US" sz="1100" dirty="0">
-                <a:solidFill>
-                  <a:srgbClr val="0D1B2A"/>
-                </a:solidFill>
-                <a:latin typeface="Calibri" pitchFamily="34" charset="0"/>
-                <a:ea typeface="Calibri" pitchFamily="34" charset="-122"/>
-                <a:cs typeface="Calibri" pitchFamily="34" charset="-120"/>
-              </a:rPr>
-              <a:t>：濾波後 AC 成分
-</a:t>
-            </a:r>
-            <a:r>
-              <a:rPr lang="en-US" sz="1100" b="1" dirty="0">
-                <a:solidFill>
-                  <a:srgbClr val="0D1B2A"/>
-                </a:solidFill>
-                <a:latin typeface="Calibri" pitchFamily="34" charset="0"/>
-                <a:ea typeface="Calibri" pitchFamily="34" charset="-122"/>
-                <a:cs typeface="Calibri" pitchFamily="34" charset="-120"/>
-              </a:rPr>
-              <a:t>0.9961</a:t>
-            </a:r>
-            <a:r>
-              <a:rPr lang="en-US" sz="1100" dirty="0">
-                <a:solidFill>
-                  <a:srgbClr val="0D1B2A"/>
-                </a:solidFill>
-                <a:latin typeface="Calibri" pitchFamily="34" charset="0"/>
-                <a:ea typeface="Calibri" pitchFamily="34" charset="-122"/>
-                <a:cs typeface="Calibri" pitchFamily="34" charset="-120"/>
-              </a:rPr>
-              <a:t>：適用 1–2 kHz 取樣率</a:t>
-            </a:r>
-            <a:endParaRPr lang="en-US" sz="1100" dirty="0"/>
-          </a:p>
-        </p:txBody>
-      </p:sp>
-      <p:sp>
-        <p:nvSpPr>
-          <p:cNvPr id="9" name="Shape 7"/>
-          <p:cNvSpPr/>
-          <p:nvPr/>
-        </p:nvSpPr>
-        <p:spPr>
-          <a:xfrm>
-            <a:off x="4800600" y="1051560"/>
-            <a:ext cx="4023360" cy="1828800"/>
-          </a:xfrm>
-          <a:prstGeom prst="rect">
-            <a:avLst/>
-          </a:prstGeom>
-          <a:solidFill>
-            <a:srgbClr val="FFF3F3"/>
-          </a:solidFill>
-          <a:ln w="12700">
-            <a:solidFill>
-              <a:srgbClr val="EF4444"/>
-            </a:solidFill>
-            <a:prstDash val="solid"/>
-          </a:ln>
-        </p:spPr>
-      </p:sp>
-      <p:sp>
-        <p:nvSpPr>
-          <p:cNvPr id="10" name="Shape 8"/>
-          <p:cNvSpPr/>
-          <p:nvPr/>
-        </p:nvSpPr>
-        <p:spPr>
-          <a:xfrm>
-            <a:off x="4800600" y="1051560"/>
-            <a:ext cx="4023360" cy="365760"/>
-          </a:xfrm>
-          <a:prstGeom prst="rect">
-            <a:avLst/>
-          </a:prstGeom>
-          <a:solidFill>
-            <a:srgbClr val="EF4444"/>
-          </a:solidFill>
-          <a:ln/>
-        </p:spPr>
-      </p:sp>
-      <p:sp>
-        <p:nvSpPr>
-          <p:cNvPr id="11" name="Text 9"/>
-          <p:cNvSpPr/>
-          <p:nvPr/>
-        </p:nvSpPr>
-        <p:spPr>
-          <a:xfrm>
-            <a:off x="4846320" y="1051560"/>
-            <a:ext cx="3931920" cy="365760"/>
-          </a:xfrm>
-          <a:prstGeom prst="rect">
-            <a:avLst/>
-          </a:prstGeom>
-          <a:noFill/>
-          <a:ln/>
-        </p:spPr>
-        <p:txBody>
-          <a:bodyPr wrap="square" rtlCol="0" anchor="ctr"/>
-          <a:lstStyle/>
-          <a:p>
-            <a:pPr marL="0" indent="0">
-              <a:buNone/>
-            </a:pPr>
-            <a:r>
-              <a:rPr lang="en-US" sz="1200" b="1" dirty="0">
-                <a:solidFill>
-                  <a:srgbClr val="FFFFFF"/>
-                </a:solidFill>
-                <a:latin typeface="Calibri" pitchFamily="34" charset="0"/>
-                <a:ea typeface="Calibri" pitchFamily="34" charset="-122"/>
-                <a:cs typeface="Calibri" pitchFamily="34" charset="-120"/>
-              </a:rPr>
-              <a:t>SCT 連接偵測（標準差法）</a:t>
-            </a:r>
-            <a:endParaRPr lang="en-US" sz="1200" dirty="0"/>
-          </a:p>
-        </p:txBody>
-      </p:sp>
-      <p:sp>
-        <p:nvSpPr>
-          <p:cNvPr id="12" name="Shape 10"/>
-          <p:cNvSpPr/>
-          <p:nvPr/>
-        </p:nvSpPr>
-        <p:spPr>
-          <a:xfrm>
-            <a:off x="4846320" y="1508760"/>
-            <a:ext cx="1005840" cy="347472"/>
-          </a:xfrm>
-          <a:prstGeom prst="rect">
-            <a:avLst/>
-          </a:prstGeom>
-          <a:solidFill>
-            <a:srgbClr val="EF4444"/>
-          </a:solidFill>
-          <a:ln/>
-        </p:spPr>
-      </p:sp>
-      <p:sp>
-        <p:nvSpPr>
-          <p:cNvPr id="13" name="Text 11"/>
-          <p:cNvSpPr/>
-          <p:nvPr/>
-        </p:nvSpPr>
-        <p:spPr>
-          <a:xfrm>
-            <a:off x="4846320" y="1508760"/>
-            <a:ext cx="1005840" cy="347472"/>
-          </a:xfrm>
-          <a:prstGeom prst="rect">
-            <a:avLst/>
-          </a:prstGeom>
-          <a:noFill/>
-          <a:ln/>
-        </p:spPr>
-        <p:txBody>
-          <a:bodyPr wrap="square" rtlCol="0" anchor="ctr"/>
-          <a:lstStyle/>
-          <a:p>
-            <a:pPr marL="0" indent="0" algn="ctr">
-              <a:buNone/>
-            </a:pPr>
-            <a:r>
-              <a:rPr lang="en-US" sz="950" dirty="0">
-                <a:solidFill>
-                  <a:srgbClr val="FFFFFF"/>
-                </a:solidFill>
-                <a:latin typeface="Calibri" pitchFamily="34" charset="0"/>
-                <a:ea typeface="Calibri" pitchFamily="34" charset="-122"/>
-                <a:cs typeface="Calibri" pitchFamily="34" charset="-120"/>
-              </a:rPr>
-              <a:t>未連接</a:t>
-            </a:r>
-            <a:endParaRPr lang="en-US" sz="950" dirty="0"/>
-          </a:p>
-        </p:txBody>
-      </p:sp>
-      <p:sp>
-        <p:nvSpPr>
-          <p:cNvPr id="14" name="Text 12"/>
-          <p:cNvSpPr/>
-          <p:nvPr/>
-        </p:nvSpPr>
-        <p:spPr>
-          <a:xfrm>
-            <a:off x="5925312" y="1508760"/>
-            <a:ext cx="1828800" cy="347472"/>
-          </a:xfrm>
-          <a:prstGeom prst="rect">
-            <a:avLst/>
-          </a:prstGeom>
-          <a:noFill/>
-          <a:ln/>
-        </p:spPr>
-        <p:txBody>
-          <a:bodyPr wrap="square" rtlCol="0" anchor="ctr"/>
-          <a:lstStyle/>
-          <a:p>
-            <a:pPr marL="0" indent="0">
-              <a:buNone/>
-            </a:pPr>
-            <a:r>
-              <a:rPr lang="en-US" sz="1100" dirty="0">
-                <a:solidFill>
-                  <a:srgbClr val="0D1B2A"/>
-                </a:solidFill>
-                <a:latin typeface="Calibri" pitchFamily="34" charset="0"/>
-                <a:ea typeface="Calibri" pitchFamily="34" charset="-122"/>
-                <a:cs typeface="Calibri" pitchFamily="34" charset="-120"/>
-              </a:rPr>
-              <a:t>標準差 &lt; 2 mV</a:t>
-            </a:r>
-            <a:endParaRPr lang="en-US" sz="1100" dirty="0"/>
-          </a:p>
-        </p:txBody>
-      </p:sp>
-      <p:sp>
-        <p:nvSpPr>
-          <p:cNvPr id="15" name="Shape 13"/>
-          <p:cNvSpPr/>
-          <p:nvPr/>
-        </p:nvSpPr>
-        <p:spPr>
-          <a:xfrm>
-            <a:off x="4846320" y="1938528"/>
-            <a:ext cx="1005840" cy="347472"/>
-          </a:xfrm>
-          <a:prstGeom prst="rect">
-            <a:avLst/>
-          </a:prstGeom>
-          <a:solidFill>
-            <a:srgbClr val="F59E0B"/>
-          </a:solidFill>
-          <a:ln/>
-        </p:spPr>
-      </p:sp>
-      <p:sp>
-        <p:nvSpPr>
-          <p:cNvPr id="16" name="Text 14"/>
-          <p:cNvSpPr/>
-          <p:nvPr/>
-        </p:nvSpPr>
-        <p:spPr>
-          <a:xfrm>
-            <a:off x="4846320" y="1938528"/>
-            <a:ext cx="1005840" cy="347472"/>
-          </a:xfrm>
-          <a:prstGeom prst="rect">
-            <a:avLst/>
-          </a:prstGeom>
-          <a:noFill/>
-          <a:ln/>
-        </p:spPr>
-        <p:txBody>
-          <a:bodyPr wrap="square" rtlCol="0" anchor="ctr"/>
-          <a:lstStyle/>
-          <a:p>
-            <a:pPr marL="0" indent="0" algn="ctr">
-              <a:buNone/>
-            </a:pPr>
-            <a:r>
-              <a:rPr lang="en-US" sz="950" dirty="0">
-                <a:solidFill>
-                  <a:srgbClr val="FFFFFF"/>
-                </a:solidFill>
-                <a:latin typeface="Calibri" pitchFamily="34" charset="0"/>
-                <a:ea typeface="Calibri" pitchFamily="34" charset="-122"/>
-                <a:cs typeface="Calibri" pitchFamily="34" charset="-120"/>
-              </a:rPr>
-              <a:t>已連接（無負載）</a:t>
-            </a:r>
-            <a:endParaRPr lang="en-US" sz="950" dirty="0"/>
-          </a:p>
-        </p:txBody>
-      </p:sp>
-      <p:sp>
-        <p:nvSpPr>
-          <p:cNvPr id="17" name="Text 15"/>
-          <p:cNvSpPr/>
-          <p:nvPr/>
-        </p:nvSpPr>
-        <p:spPr>
-          <a:xfrm>
-            <a:off x="5925312" y="1938528"/>
-            <a:ext cx="1828800" cy="347472"/>
-          </a:xfrm>
-          <a:prstGeom prst="rect">
-            <a:avLst/>
-          </a:prstGeom>
-          <a:noFill/>
-          <a:ln/>
-        </p:spPr>
-        <p:txBody>
-          <a:bodyPr wrap="square" rtlCol="0" anchor="ctr"/>
-          <a:lstStyle/>
-          <a:p>
-            <a:pPr marL="0" indent="0">
-              <a:buNone/>
-            </a:pPr>
-            <a:r>
-              <a:rPr lang="en-US" sz="1100" dirty="0">
-                <a:solidFill>
-                  <a:srgbClr val="0D1B2A"/>
-                </a:solidFill>
-                <a:latin typeface="Calibri" pitchFamily="34" charset="0"/>
-                <a:ea typeface="Calibri" pitchFamily="34" charset="-122"/>
-                <a:cs typeface="Calibri" pitchFamily="34" charset="-120"/>
-              </a:rPr>
-              <a:t>標準差 &gt; 5 mV</a:t>
-            </a:r>
-            <a:endParaRPr lang="en-US" sz="1100" dirty="0"/>
-          </a:p>
-        </p:txBody>
-      </p:sp>
-      <p:sp>
-        <p:nvSpPr>
-          <p:cNvPr id="18" name="Shape 16"/>
-          <p:cNvSpPr/>
-          <p:nvPr/>
-        </p:nvSpPr>
-        <p:spPr>
-          <a:xfrm>
-            <a:off x="4846320" y="2368296"/>
-            <a:ext cx="1005840" cy="347472"/>
-          </a:xfrm>
-          <a:prstGeom prst="rect">
-            <a:avLst/>
-          </a:prstGeom>
-          <a:solidFill>
-            <a:srgbClr val="10B981"/>
-          </a:solidFill>
-          <a:ln/>
-        </p:spPr>
-      </p:sp>
-      <p:sp>
-        <p:nvSpPr>
-          <p:cNvPr id="19" name="Text 17"/>
-          <p:cNvSpPr/>
-          <p:nvPr/>
-        </p:nvSpPr>
-        <p:spPr>
-          <a:xfrm>
-            <a:off x="4846320" y="2368296"/>
-            <a:ext cx="1005840" cy="347472"/>
-          </a:xfrm>
-          <a:prstGeom prst="rect">
-            <a:avLst/>
-          </a:prstGeom>
-          <a:noFill/>
-          <a:ln/>
-        </p:spPr>
-        <p:txBody>
-          <a:bodyPr wrap="square" rtlCol="0" anchor="ctr"/>
-          <a:lstStyle/>
-          <a:p>
-            <a:pPr marL="0" indent="0" algn="ctr">
-              <a:buNone/>
-            </a:pPr>
-            <a:r>
-              <a:rPr lang="en-US" sz="950" dirty="0">
-                <a:solidFill>
-                  <a:srgbClr val="FFFFFF"/>
-                </a:solidFill>
-                <a:latin typeface="Calibri" pitchFamily="34" charset="0"/>
-                <a:ea typeface="Calibri" pitchFamily="34" charset="-122"/>
-                <a:cs typeface="Calibri" pitchFamily="34" charset="-120"/>
-              </a:rPr>
-              <a:t>已連接（有負載）</a:t>
-            </a:r>
-            <a:endParaRPr lang="en-US" sz="950" dirty="0"/>
-          </a:p>
-        </p:txBody>
-      </p:sp>
-      <p:sp>
-        <p:nvSpPr>
-          <p:cNvPr id="20" name="Text 18"/>
-          <p:cNvSpPr/>
-          <p:nvPr/>
-        </p:nvSpPr>
-        <p:spPr>
-          <a:xfrm>
-            <a:off x="5925312" y="2368296"/>
-            <a:ext cx="1828800" cy="347472"/>
-          </a:xfrm>
-          <a:prstGeom prst="rect">
-            <a:avLst/>
-          </a:prstGeom>
-          <a:noFill/>
-          <a:ln/>
-        </p:spPr>
-        <p:txBody>
-          <a:bodyPr wrap="square" rtlCol="0" anchor="ctr"/>
-          <a:lstStyle/>
-          <a:p>
-            <a:pPr marL="0" indent="0">
-              <a:buNone/>
-            </a:pPr>
-            <a:r>
-              <a:rPr lang="en-US" sz="1100" dirty="0">
-                <a:solidFill>
-                  <a:srgbClr val="0D1B2A"/>
-                </a:solidFill>
-                <a:latin typeface="Calibri" pitchFamily="34" charset="0"/>
-                <a:ea typeface="Calibri" pitchFamily="34" charset="-122"/>
-                <a:cs typeface="Calibri" pitchFamily="34" charset="-120"/>
-              </a:rPr>
-              <a:t>標準差 &gt;&gt; 10 mV</a:t>
-            </a:r>
-            <a:endParaRPr lang="en-US" sz="1100" dirty="0"/>
-          </a:p>
-        </p:txBody>
-      </p:sp>
-      <p:sp>
-        <p:nvSpPr>
-          <p:cNvPr id="21" name="Text 19"/>
-          <p:cNvSpPr/>
-          <p:nvPr/>
-        </p:nvSpPr>
-        <p:spPr>
-          <a:xfrm>
-            <a:off x="4919472" y="2647188"/>
-            <a:ext cx="3840480" cy="320040"/>
-          </a:xfrm>
-          <a:prstGeom prst="rect">
-            <a:avLst/>
-          </a:prstGeom>
-          <a:noFill/>
-          <a:ln/>
-        </p:spPr>
-        <p:txBody>
-          <a:bodyPr wrap="square" rtlCol="0" anchor="ctr"/>
-          <a:lstStyle/>
-          <a:p>
-            <a:pPr marL="0" indent="0">
-              <a:buNone/>
-            </a:pPr>
-            <a:r>
-              <a:rPr lang="en-US" sz="1100" i="1" dirty="0">
-                <a:solidFill>
-                  <a:srgbClr val="64748B"/>
-                </a:solidFill>
-                <a:latin typeface="Calibri" pitchFamily="34" charset="0"/>
-                <a:ea typeface="Calibri" pitchFamily="34" charset="-122"/>
-                <a:cs typeface="Calibri" pitchFamily="34" charset="-120"/>
-              </a:rPr>
-              <a:t>→ 取 50 樣本，標準差 &lt; 3mV 判定未連接</a:t>
-            </a:r>
-            <a:endParaRPr lang="en-US" sz="1100" dirty="0"/>
-          </a:p>
-        </p:txBody>
-      </p:sp>
-      <p:sp>
-        <p:nvSpPr>
-          <p:cNvPr id="22" name="Shape 20"/>
-          <p:cNvSpPr/>
-          <p:nvPr/>
-        </p:nvSpPr>
-        <p:spPr>
-          <a:xfrm>
-            <a:off x="320040" y="3017520"/>
-            <a:ext cx="8503920" cy="365760"/>
-          </a:xfrm>
-          <a:prstGeom prst="rect">
-            <a:avLst/>
-          </a:prstGeom>
-          <a:solidFill>
-            <a:srgbClr val="1B4F72"/>
-          </a:solidFill>
-          <a:ln/>
-        </p:spPr>
-      </p:sp>
-      <p:sp>
-        <p:nvSpPr>
-          <p:cNvPr id="23" name="Text 21"/>
-          <p:cNvSpPr/>
-          <p:nvPr/>
-        </p:nvSpPr>
-        <p:spPr>
-          <a:xfrm>
-            <a:off x="320040" y="3017520"/>
-            <a:ext cx="8503920" cy="365760"/>
-          </a:xfrm>
-          <a:prstGeom prst="rect">
-            <a:avLst/>
-          </a:prstGeom>
-          <a:noFill/>
-          <a:ln/>
-        </p:spPr>
-        <p:txBody>
-          <a:bodyPr wrap="square" rtlCol="0" anchor="ctr"/>
-          <a:lstStyle/>
-          <a:p>
-            <a:pPr marL="0" indent="0" algn="ctr">
-              <a:buNone/>
-            </a:pPr>
-            <a:r>
-              <a:rPr lang="en-US" sz="1300" b="1" dirty="0">
-                <a:solidFill>
-                  <a:srgbClr val="FFFFFF"/>
-                </a:solidFill>
-                <a:latin typeface="Calibri" pitchFamily="34" charset="0"/>
-                <a:ea typeface="Calibri" pitchFamily="34" charset="-122"/>
-                <a:cs typeface="Calibri" pitchFamily="34" charset="-120"/>
-              </a:rPr>
-              <a:t>RMS 電流計算流程</a:t>
-            </a:r>
-            <a:endParaRPr lang="en-US" sz="1300" dirty="0"/>
-          </a:p>
-        </p:txBody>
-      </p:sp>
-      <p:sp>
-        <p:nvSpPr>
-          <p:cNvPr id="24" name="Shape 22"/>
-          <p:cNvSpPr/>
-          <p:nvPr/>
-        </p:nvSpPr>
-        <p:spPr>
-          <a:xfrm>
-            <a:off x="320040" y="3474720"/>
-            <a:ext cx="1261872" cy="1005840"/>
-          </a:xfrm>
-          <a:prstGeom prst="rect">
-            <a:avLst/>
-          </a:prstGeom>
-          <a:solidFill>
-            <a:srgbClr val="0D1B2A"/>
-          </a:solidFill>
-          <a:ln w="12700">
-            <a:solidFill>
-              <a:srgbClr val="FFFFFF"/>
-            </a:solidFill>
-            <a:prstDash val="solid"/>
-          </a:ln>
-        </p:spPr>
-      </p:sp>
-      <p:sp>
-        <p:nvSpPr>
-          <p:cNvPr id="25" name="Text 23"/>
-          <p:cNvSpPr/>
-          <p:nvPr/>
-        </p:nvSpPr>
-        <p:spPr>
-          <a:xfrm>
-            <a:off x="320040" y="3493008"/>
-            <a:ext cx="1261872" cy="347472"/>
-          </a:xfrm>
-          <a:prstGeom prst="rect">
-            <a:avLst/>
-          </a:prstGeom>
-          <a:noFill/>
-          <a:ln/>
-        </p:spPr>
-        <p:txBody>
-          <a:bodyPr wrap="square" rtlCol="0" anchor="ctr"/>
-          <a:lstStyle/>
-          <a:p>
-            <a:pPr marL="0" indent="0" algn="ctr">
-              <a:buNone/>
-            </a:pPr>
-            <a:r>
-              <a:rPr lang="en-US" sz="1600" b="1" dirty="0">
-                <a:solidFill>
-                  <a:srgbClr val="00A8CC"/>
-                </a:solidFill>
-                <a:latin typeface="Calibri" pitchFamily="34" charset="0"/>
-                <a:ea typeface="Calibri" pitchFamily="34" charset="-122"/>
-                <a:cs typeface="Calibri" pitchFamily="34" charset="-120"/>
-              </a:rPr>
-              <a:t>1.</a:t>
-            </a:r>
-            <a:endParaRPr lang="en-US" sz="1600" dirty="0"/>
-          </a:p>
-        </p:txBody>
-      </p:sp>
-      <p:sp>
-        <p:nvSpPr>
-          <p:cNvPr id="26" name="Text 24"/>
-          <p:cNvSpPr/>
-          <p:nvPr/>
-        </p:nvSpPr>
-        <p:spPr>
-          <a:xfrm>
-            <a:off x="320040" y="3840480"/>
-            <a:ext cx="1261872" cy="594360"/>
-          </a:xfrm>
-          <a:prstGeom prst="rect">
-            <a:avLst/>
-          </a:prstGeom>
-          <a:noFill/>
-          <a:ln/>
-        </p:spPr>
-        <p:txBody>
-          <a:bodyPr wrap="square" rtlCol="0" anchor="ctr"/>
-          <a:lstStyle/>
-          <a:p>
-            <a:pPr marL="0" indent="0" algn="ctr">
-              <a:buNone/>
-            </a:pPr>
-            <a:r>
-              <a:rPr lang="en-US" sz="1100" dirty="0">
-                <a:solidFill>
-                  <a:srgbClr val="FFFFFF"/>
-                </a:solidFill>
-                <a:latin typeface="Calibri" pitchFamily="34" charset="0"/>
-                <a:ea typeface="Calibri" pitchFamily="34" charset="-122"/>
-                <a:cs typeface="Calibri" pitchFamily="34" charset="-120"/>
-              </a:rPr>
-              <a:t>200ms 取樣窗口</a:t>
-            </a:r>
-            <a:endParaRPr lang="en-US" sz="1100" dirty="0"/>
-          </a:p>
-        </p:txBody>
-      </p:sp>
-      <p:sp>
-        <p:nvSpPr>
-          <p:cNvPr id="27" name="Shape 25"/>
-          <p:cNvSpPr/>
-          <p:nvPr/>
-        </p:nvSpPr>
-        <p:spPr>
-          <a:xfrm>
-            <a:off x="1764792" y="3474720"/>
-            <a:ext cx="1261872" cy="1005840"/>
-          </a:xfrm>
-          <a:prstGeom prst="rect">
-            <a:avLst/>
-          </a:prstGeom>
-          <a:solidFill>
-            <a:srgbClr val="1B4F72"/>
-          </a:solidFill>
-          <a:ln w="12700">
-            <a:solidFill>
-              <a:srgbClr val="FFFFFF"/>
-            </a:solidFill>
-            <a:prstDash val="solid"/>
-          </a:ln>
-        </p:spPr>
-      </p:sp>
-      <p:sp>
-        <p:nvSpPr>
-          <p:cNvPr id="28" name="Text 26"/>
-          <p:cNvSpPr/>
-          <p:nvPr/>
-        </p:nvSpPr>
-        <p:spPr>
-          <a:xfrm>
-            <a:off x="1764792" y="3493008"/>
-            <a:ext cx="1261872" cy="347472"/>
-          </a:xfrm>
-          <a:prstGeom prst="rect">
-            <a:avLst/>
-          </a:prstGeom>
-          <a:noFill/>
-          <a:ln/>
-        </p:spPr>
-        <p:txBody>
-          <a:bodyPr wrap="square" rtlCol="0" anchor="ctr"/>
-          <a:lstStyle/>
-          <a:p>
-            <a:pPr marL="0" indent="0" algn="ctr">
-              <a:buNone/>
-            </a:pPr>
-            <a:r>
-              <a:rPr lang="en-US" sz="1600" b="1" dirty="0">
-                <a:solidFill>
-                  <a:srgbClr val="00A8CC"/>
-                </a:solidFill>
-                <a:latin typeface="Calibri" pitchFamily="34" charset="0"/>
-                <a:ea typeface="Calibri" pitchFamily="34" charset="-122"/>
-                <a:cs typeface="Calibri" pitchFamily="34" charset="-120"/>
-              </a:rPr>
-              <a:t>2.</a:t>
-            </a:r>
-            <a:endParaRPr lang="en-US" sz="1600" dirty="0"/>
-          </a:p>
-        </p:txBody>
-      </p:sp>
-      <p:sp>
-        <p:nvSpPr>
-          <p:cNvPr id="29" name="Text 27"/>
-          <p:cNvSpPr/>
-          <p:nvPr/>
-        </p:nvSpPr>
-        <p:spPr>
-          <a:xfrm>
-            <a:off x="1764792" y="3840480"/>
-            <a:ext cx="1261872" cy="594360"/>
-          </a:xfrm>
-          <a:prstGeom prst="rect">
-            <a:avLst/>
-          </a:prstGeom>
-          <a:noFill/>
-          <a:ln/>
-        </p:spPr>
-        <p:txBody>
-          <a:bodyPr wrap="square" rtlCol="0" anchor="ctr"/>
-          <a:lstStyle/>
-          <a:p>
-            <a:pPr marL="0" indent="0" algn="ctr">
-              <a:buNone/>
-            </a:pPr>
-            <a:r>
-              <a:rPr lang="en-US" sz="1100" dirty="0">
-                <a:solidFill>
-                  <a:srgbClr val="FFFFFF"/>
-                </a:solidFill>
-                <a:latin typeface="Calibri" pitchFamily="34" charset="0"/>
-                <a:ea typeface="Calibri" pitchFamily="34" charset="-122"/>
-                <a:cs typeface="Calibri" pitchFamily="34" charset="-120"/>
-              </a:rPr>
-              <a:t>HPF 濾除 DC</a:t>
-            </a:r>
-            <a:endParaRPr lang="en-US" sz="1100" dirty="0"/>
-          </a:p>
-        </p:txBody>
-      </p:sp>
-      <p:sp>
-        <p:nvSpPr>
-          <p:cNvPr id="30" name="Shape 28"/>
-          <p:cNvSpPr/>
-          <p:nvPr/>
-        </p:nvSpPr>
-        <p:spPr>
-          <a:xfrm>
-            <a:off x="3209544" y="3474720"/>
-            <a:ext cx="1261872" cy="1005840"/>
-          </a:xfrm>
-          <a:prstGeom prst="rect">
-            <a:avLst/>
-          </a:prstGeom>
-          <a:solidFill>
-            <a:srgbClr val="0D1B2A"/>
-          </a:solidFill>
-          <a:ln w="12700">
-            <a:solidFill>
-              <a:srgbClr val="FFFFFF"/>
-            </a:solidFill>
-            <a:prstDash val="solid"/>
-          </a:ln>
-        </p:spPr>
-      </p:sp>
-      <p:sp>
-        <p:nvSpPr>
-          <p:cNvPr id="31" name="Text 29"/>
-          <p:cNvSpPr/>
-          <p:nvPr/>
-        </p:nvSpPr>
-        <p:spPr>
-          <a:xfrm>
-            <a:off x="3209544" y="3493008"/>
-            <a:ext cx="1261872" cy="347472"/>
-          </a:xfrm>
-          <a:prstGeom prst="rect">
-            <a:avLst/>
-          </a:prstGeom>
-          <a:noFill/>
-          <a:ln/>
-        </p:spPr>
-        <p:txBody>
-          <a:bodyPr wrap="square" rtlCol="0" anchor="ctr"/>
-          <a:lstStyle/>
-          <a:p>
-            <a:pPr marL="0" indent="0" algn="ctr">
-              <a:buNone/>
-            </a:pPr>
-            <a:r>
-              <a:rPr lang="en-US" sz="1600" b="1" dirty="0">
-                <a:solidFill>
-                  <a:srgbClr val="00A8CC"/>
-                </a:solidFill>
-                <a:latin typeface="Calibri" pitchFamily="34" charset="0"/>
-                <a:ea typeface="Calibri" pitchFamily="34" charset="-122"/>
-                <a:cs typeface="Calibri" pitchFamily="34" charset="-120"/>
-              </a:rPr>
-              <a:t>3.</a:t>
-            </a:r>
-            <a:endParaRPr lang="en-US" sz="1600" dirty="0"/>
-          </a:p>
-        </p:txBody>
-      </p:sp>
-      <p:sp>
-        <p:nvSpPr>
-          <p:cNvPr id="32" name="Text 30"/>
-          <p:cNvSpPr/>
-          <p:nvPr/>
-        </p:nvSpPr>
-        <p:spPr>
-          <a:xfrm>
-            <a:off x="3209544" y="3840480"/>
-            <a:ext cx="1261872" cy="594360"/>
-          </a:xfrm>
-          <a:prstGeom prst="rect">
-            <a:avLst/>
-          </a:prstGeom>
-          <a:noFill/>
-          <a:ln/>
-        </p:spPr>
-        <p:txBody>
-          <a:bodyPr wrap="square" rtlCol="0" anchor="ctr"/>
-          <a:lstStyle/>
-          <a:p>
-            <a:pPr marL="0" indent="0" algn="ctr">
-              <a:buNone/>
-            </a:pPr>
-            <a:r>
-              <a:rPr lang="en-US" sz="1100" dirty="0">
-                <a:solidFill>
-                  <a:srgbClr val="FFFFFF"/>
-                </a:solidFill>
-                <a:latin typeface="Calibri" pitchFamily="34" charset="0"/>
-                <a:ea typeface="Calibri" pitchFamily="34" charset="-122"/>
-                <a:cs typeface="Calibri" pitchFamily="34" charset="-120"/>
-              </a:rPr>
-              <a:t>樣本平方累加</a:t>
-            </a:r>
-            <a:endParaRPr lang="en-US" sz="1100" dirty="0"/>
-          </a:p>
-        </p:txBody>
-      </p:sp>
-      <p:sp>
-        <p:nvSpPr>
-          <p:cNvPr id="33" name="Shape 31"/>
-          <p:cNvSpPr/>
-          <p:nvPr/>
-        </p:nvSpPr>
-        <p:spPr>
-          <a:xfrm>
-            <a:off x="4654296" y="3474720"/>
-            <a:ext cx="1261872" cy="1005840"/>
-          </a:xfrm>
-          <a:prstGeom prst="rect">
-            <a:avLst/>
-          </a:prstGeom>
-          <a:solidFill>
-            <a:srgbClr val="1B4F72"/>
-          </a:solidFill>
-          <a:ln w="12700">
-            <a:solidFill>
-              <a:srgbClr val="FFFFFF"/>
-            </a:solidFill>
-            <a:prstDash val="solid"/>
-          </a:ln>
-        </p:spPr>
-      </p:sp>
-      <p:sp>
-        <p:nvSpPr>
-          <p:cNvPr id="34" name="Text 32"/>
-          <p:cNvSpPr/>
-          <p:nvPr/>
-        </p:nvSpPr>
-        <p:spPr>
-          <a:xfrm>
-            <a:off x="4654296" y="3493008"/>
-            <a:ext cx="1261872" cy="347472"/>
-          </a:xfrm>
-          <a:prstGeom prst="rect">
-            <a:avLst/>
-          </a:prstGeom>
-          <a:noFill/>
-          <a:ln/>
-        </p:spPr>
-        <p:txBody>
-          <a:bodyPr wrap="square" rtlCol="0" anchor="ctr"/>
-          <a:lstStyle/>
-          <a:p>
-            <a:pPr marL="0" indent="0" algn="ctr">
-              <a:buNone/>
-            </a:pPr>
-            <a:r>
-              <a:rPr lang="en-US" sz="1600" b="1" dirty="0">
-                <a:solidFill>
-                  <a:srgbClr val="00A8CC"/>
-                </a:solidFill>
-                <a:latin typeface="Calibri" pitchFamily="34" charset="0"/>
-                <a:ea typeface="Calibri" pitchFamily="34" charset="-122"/>
-                <a:cs typeface="Calibri" pitchFamily="34" charset="-120"/>
-              </a:rPr>
-              <a:t>4.</a:t>
-            </a:r>
-            <a:endParaRPr lang="en-US" sz="1600" dirty="0"/>
-          </a:p>
-        </p:txBody>
-      </p:sp>
-      <p:sp>
-        <p:nvSpPr>
-          <p:cNvPr id="35" name="Text 33"/>
-          <p:cNvSpPr/>
-          <p:nvPr/>
-        </p:nvSpPr>
-        <p:spPr>
-          <a:xfrm>
-            <a:off x="4654296" y="3840480"/>
-            <a:ext cx="1261872" cy="594360"/>
-          </a:xfrm>
-          <a:prstGeom prst="rect">
-            <a:avLst/>
-          </a:prstGeom>
-          <a:noFill/>
-          <a:ln/>
-        </p:spPr>
-        <p:txBody>
-          <a:bodyPr wrap="square" rtlCol="0" anchor="ctr"/>
-          <a:lstStyle/>
-          <a:p>
-            <a:pPr marL="0" indent="0" algn="ctr">
-              <a:buNone/>
-            </a:pPr>
-            <a:r>
-              <a:rPr lang="en-US" sz="1100" dirty="0">
-                <a:solidFill>
-                  <a:srgbClr val="FFFFFF"/>
-                </a:solidFill>
-                <a:latin typeface="Calibri" pitchFamily="34" charset="0"/>
-                <a:ea typeface="Calibri" pitchFamily="34" charset="-122"/>
-                <a:cs typeface="Calibri" pitchFamily="34" charset="-120"/>
-              </a:rPr>
-              <a:t>開根號 RMS</a:t>
-            </a:r>
-            <a:endParaRPr lang="en-US" sz="1100" dirty="0"/>
-          </a:p>
-        </p:txBody>
-      </p:sp>
-      <p:sp>
-        <p:nvSpPr>
-          <p:cNvPr id="36" name="Shape 34"/>
-          <p:cNvSpPr/>
-          <p:nvPr/>
-        </p:nvSpPr>
-        <p:spPr>
-          <a:xfrm>
-            <a:off x="6099048" y="3474720"/>
-            <a:ext cx="1261872" cy="1005840"/>
-          </a:xfrm>
-          <a:prstGeom prst="rect">
-            <a:avLst/>
-          </a:prstGeom>
-          <a:solidFill>
-            <a:srgbClr val="0D1B2A"/>
-          </a:solidFill>
-          <a:ln w="12700">
-            <a:solidFill>
-              <a:srgbClr val="FFFFFF"/>
-            </a:solidFill>
-            <a:prstDash val="solid"/>
-          </a:ln>
-        </p:spPr>
-      </p:sp>
-      <p:sp>
-        <p:nvSpPr>
-          <p:cNvPr id="37" name="Text 35"/>
-          <p:cNvSpPr/>
-          <p:nvPr/>
-        </p:nvSpPr>
-        <p:spPr>
-          <a:xfrm>
-            <a:off x="6099048" y="3493008"/>
-            <a:ext cx="1261872" cy="347472"/>
-          </a:xfrm>
-          <a:prstGeom prst="rect">
-            <a:avLst/>
-          </a:prstGeom>
-          <a:noFill/>
-          <a:ln/>
-        </p:spPr>
-        <p:txBody>
-          <a:bodyPr wrap="square" rtlCol="0" anchor="ctr"/>
-          <a:lstStyle/>
-          <a:p>
-            <a:pPr marL="0" indent="0" algn="ctr">
-              <a:buNone/>
-            </a:pPr>
-            <a:r>
-              <a:rPr lang="en-US" sz="1600" b="1" dirty="0">
-                <a:solidFill>
-                  <a:srgbClr val="00A8CC"/>
-                </a:solidFill>
-                <a:latin typeface="Calibri" pitchFamily="34" charset="0"/>
-                <a:ea typeface="Calibri" pitchFamily="34" charset="-122"/>
-                <a:cs typeface="Calibri" pitchFamily="34" charset="-120"/>
-              </a:rPr>
-              <a:t>5.</a:t>
-            </a:r>
-            <a:endParaRPr lang="en-US" sz="1600" dirty="0"/>
-          </a:p>
-        </p:txBody>
-      </p:sp>
-      <p:sp>
-        <p:nvSpPr>
-          <p:cNvPr id="38" name="Text 36"/>
-          <p:cNvSpPr/>
-          <p:nvPr/>
-        </p:nvSpPr>
-        <p:spPr>
-          <a:xfrm>
-            <a:off x="6099048" y="3840480"/>
-            <a:ext cx="1261872" cy="594360"/>
-          </a:xfrm>
-          <a:prstGeom prst="rect">
-            <a:avLst/>
-          </a:prstGeom>
-          <a:noFill/>
-          <a:ln/>
-        </p:spPr>
-        <p:txBody>
-          <a:bodyPr wrap="square" rtlCol="0" anchor="ctr"/>
-          <a:lstStyle/>
-          <a:p>
-            <a:pPr marL="0" indent="0" algn="ctr">
-              <a:buNone/>
-            </a:pPr>
-            <a:r>
-              <a:rPr lang="en-US" sz="1100" dirty="0">
-                <a:solidFill>
-                  <a:srgbClr val="FFFFFF"/>
-                </a:solidFill>
-                <a:latin typeface="Calibri" pitchFamily="34" charset="0"/>
-                <a:ea typeface="Calibri" pitchFamily="34" charset="-122"/>
-                <a:cs typeface="Calibri" pitchFamily="34" charset="-120"/>
-              </a:rPr>
-              <a:t>換算電流值</a:t>
-            </a:r>
-            <a:endParaRPr lang="en-US" sz="1100" dirty="0"/>
-          </a:p>
-        </p:txBody>
-      </p:sp>
-      <p:sp>
-        <p:nvSpPr>
-          <p:cNvPr id="39" name="Shape 37"/>
-          <p:cNvSpPr/>
-          <p:nvPr/>
-        </p:nvSpPr>
-        <p:spPr>
-          <a:xfrm>
-            <a:off x="7543800" y="3474720"/>
-            <a:ext cx="1261872" cy="1005840"/>
-          </a:xfrm>
-          <a:prstGeom prst="rect">
-            <a:avLst/>
-          </a:prstGeom>
-          <a:solidFill>
-            <a:srgbClr val="1B4F72"/>
-          </a:solidFill>
-          <a:ln w="12700">
-            <a:solidFill>
-              <a:srgbClr val="FFFFFF"/>
-            </a:solidFill>
-            <a:prstDash val="solid"/>
-          </a:ln>
-        </p:spPr>
-      </p:sp>
-      <p:sp>
-        <p:nvSpPr>
-          <p:cNvPr id="40" name="Text 38"/>
-          <p:cNvSpPr/>
-          <p:nvPr/>
-        </p:nvSpPr>
-        <p:spPr>
-          <a:xfrm>
-            <a:off x="7543800" y="3493008"/>
-            <a:ext cx="1261872" cy="347472"/>
-          </a:xfrm>
-          <a:prstGeom prst="rect">
-            <a:avLst/>
-          </a:prstGeom>
-          <a:noFill/>
-          <a:ln/>
-        </p:spPr>
-        <p:txBody>
-          <a:bodyPr wrap="square" rtlCol="0" anchor="ctr"/>
-          <a:lstStyle/>
-          <a:p>
-            <a:pPr marL="0" indent="0" algn="ctr">
-              <a:buNone/>
-            </a:pPr>
-            <a:r>
-              <a:rPr lang="en-US" sz="1600" b="1" dirty="0">
-                <a:solidFill>
-                  <a:srgbClr val="00A8CC"/>
-                </a:solidFill>
-                <a:latin typeface="Calibri" pitchFamily="34" charset="0"/>
-                <a:ea typeface="Calibri" pitchFamily="34" charset="-122"/>
-                <a:cs typeface="Calibri" pitchFamily="34" charset="-120"/>
-              </a:rPr>
-              <a:t>6.</a:t>
-            </a:r>
-            <a:endParaRPr lang="en-US" sz="1600" dirty="0"/>
-          </a:p>
-        </p:txBody>
-      </p:sp>
-      <p:sp>
-        <p:nvSpPr>
-          <p:cNvPr id="41" name="Text 39"/>
-          <p:cNvSpPr/>
-          <p:nvPr/>
-        </p:nvSpPr>
-        <p:spPr>
-          <a:xfrm>
-            <a:off x="7543800" y="3840480"/>
-            <a:ext cx="1261872" cy="594360"/>
-          </a:xfrm>
-          <a:prstGeom prst="rect">
-            <a:avLst/>
-          </a:prstGeom>
-          <a:noFill/>
-          <a:ln/>
-        </p:spPr>
-        <p:txBody>
-          <a:bodyPr wrap="square" rtlCol="0" anchor="ctr"/>
-          <a:lstStyle/>
-          <a:p>
-            <a:pPr marL="0" indent="0" algn="ctr">
-              <a:buNone/>
-            </a:pPr>
-            <a:r>
-              <a:rPr lang="en-US" sz="1100" dirty="0">
-                <a:solidFill>
-                  <a:srgbClr val="FFFFFF"/>
-                </a:solidFill>
-                <a:latin typeface="Calibri" pitchFamily="34" charset="0"/>
-                <a:ea typeface="Calibri" pitchFamily="34" charset="-122"/>
-                <a:cs typeface="Calibri" pitchFamily="34" charset="-120"/>
-              </a:rPr>
-              <a:t>雜訊門檻歸零</a:t>
-            </a:r>
-            <a:endParaRPr lang="en-US" sz="1100" dirty="0"/>
-          </a:p>
-        </p:txBody>
-      </p:sp>
-    </p:spTree>
-  </p:cSld>
-  <p:clrMapOvr>
-    <a:masterClrMapping/>
-  </p:clrMapOvr>
-</p:sld>
-</file>
-
-<file path=ppt/slides/slide9.xml><?xml version="1.0" encoding="utf-8"?>
-<p:sld xmlns:a="http://schemas.openxmlformats.org/drawingml/2006/main" xmlns:r="http://schemas.openxmlformats.org/officeDocument/2006/relationships" xmlns:p="http://schemas.openxmlformats.org/presentationml/2006/main">
-  <p:cSld name="Slide 8">
-    <p:bg>
-      <p:bgPr>
-        <a:solidFill>
-          <a:srgbClr val="FFFFFF"/>
-        </a:solidFill>
-        <a:effectLst/>
-      </p:bgPr>
-    </p:bg>
-    <p:spTree>
-      <p:nvGrpSpPr>
-        <p:cNvPr id="1" name=""/>
-        <p:cNvGrpSpPr/>
-        <p:nvPr/>
-      </p:nvGrpSpPr>
-      <p:grpSpPr>
-        <a:xfrm>
-          <a:off x="0" y="0"/>
-          <a:ext cx="0" cy="0"/>
-          <a:chOff x="0" y="0"/>
-          <a:chExt cx="0" cy="0"/>
-        </a:xfrm>
-      </p:grpSpPr>
-      <p:sp>
-        <p:nvSpPr>
-          <p:cNvPr id="2" name="Shape 0"/>
-          <p:cNvSpPr/>
-          <p:nvPr/>
-        </p:nvSpPr>
-        <p:spPr>
-          <a:xfrm>
-            <a:off x="0" y="0"/>
-            <a:ext cx="9144000" cy="960120"/>
-          </a:xfrm>
-          <a:prstGeom prst="rect">
-            <a:avLst/>
-          </a:prstGeom>
-          <a:solidFill>
-            <a:srgbClr val="0D1B2A"/>
-          </a:solidFill>
-          <a:ln/>
-        </p:spPr>
-      </p:sp>
-      <p:sp>
-        <p:nvSpPr>
-          <p:cNvPr id="3" name="Text 1"/>
-          <p:cNvSpPr/>
-          <p:nvPr/>
-        </p:nvSpPr>
-        <p:spPr>
-          <a:xfrm>
-            <a:off x="457200" y="91440"/>
-            <a:ext cx="8229600" cy="777240"/>
-          </a:xfrm>
-          <a:prstGeom prst="rect">
-            <a:avLst/>
-          </a:prstGeom>
-          <a:noFill/>
-          <a:ln/>
-        </p:spPr>
-        <p:txBody>
-          <a:bodyPr wrap="square" rtlCol="0" anchor="ctr"/>
-          <a:lstStyle/>
-          <a:p>
-            <a:pPr marL="0" indent="0">
-              <a:buNone/>
-            </a:pPr>
-            <a:r>
-              <a:rPr lang="en-US" sz="2600" b="1" dirty="0">
-                <a:solidFill>
-                  <a:srgbClr val="FFFFFF"/>
-                </a:solidFill>
-                <a:latin typeface="Calibri" pitchFamily="34" charset="0"/>
-                <a:ea typeface="Calibri" pitchFamily="34" charset="-122"/>
-                <a:cs typeface="Calibri" pitchFamily="34" charset="-120"/>
-              </a:rPr>
-              <a:t>05　評估方法與測試設計</a:t>
-            </a:r>
-            <a:endParaRPr lang="en-US" sz="2600" dirty="0"/>
-          </a:p>
-        </p:txBody>
-      </p:sp>
-      <p:sp>
-        <p:nvSpPr>
-          <p:cNvPr id="4" name="Shape 2"/>
-          <p:cNvSpPr/>
-          <p:nvPr/>
-        </p:nvSpPr>
-        <p:spPr>
-          <a:xfrm>
-            <a:off x="320040" y="1097280"/>
-            <a:ext cx="4114800" cy="2377440"/>
-          </a:xfrm>
-          <a:prstGeom prst="rect">
-            <a:avLst/>
-          </a:prstGeom>
-          <a:solidFill>
-            <a:srgbClr val="F1F5F9"/>
-          </a:solidFill>
-          <a:ln w="12700">
-            <a:solidFill>
-              <a:srgbClr val="1B4F72"/>
-            </a:solidFill>
-            <a:prstDash val="solid"/>
-          </a:ln>
-        </p:spPr>
-      </p:sp>
-      <p:sp>
-        <p:nvSpPr>
-          <p:cNvPr id="5" name="Shape 3"/>
-          <p:cNvSpPr/>
-          <p:nvPr/>
-        </p:nvSpPr>
-        <p:spPr>
-          <a:xfrm>
-            <a:off x="320040" y="1097280"/>
-            <a:ext cx="4114800" cy="457200"/>
-          </a:xfrm>
-          <a:prstGeom prst="rect">
-            <a:avLst/>
-          </a:prstGeom>
-          <a:solidFill>
-            <a:srgbClr val="1B4F72"/>
-          </a:solidFill>
-          <a:ln/>
-        </p:spPr>
-      </p:sp>
-      <p:sp>
-        <p:nvSpPr>
-          <p:cNvPr id="6" name="Text 4"/>
-          <p:cNvSpPr/>
-          <p:nvPr/>
-        </p:nvSpPr>
-        <p:spPr>
-          <a:xfrm>
-            <a:off x="457200" y="1097280"/>
-            <a:ext cx="3840480" cy="457200"/>
-          </a:xfrm>
-          <a:prstGeom prst="rect">
-            <a:avLst/>
-          </a:prstGeom>
-          <a:noFill/>
-          <a:ln/>
-        </p:spPr>
-        <p:txBody>
-          <a:bodyPr wrap="square" rtlCol="0" anchor="ctr"/>
-          <a:lstStyle/>
-          <a:p>
-            <a:pPr marL="0" indent="0">
-              <a:buNone/>
-            </a:pPr>
-            <a:r>
-              <a:rPr lang="en-US" sz="1300" b="1" dirty="0">
-                <a:solidFill>
-                  <a:srgbClr val="FFFFFF"/>
-                </a:solidFill>
-                <a:latin typeface="Calibri" pitchFamily="34" charset="0"/>
-                <a:ea typeface="Calibri" pitchFamily="34" charset="-122"/>
-                <a:cs typeface="Calibri" pitchFamily="34" charset="-120"/>
-              </a:rPr>
-              <a:t>階段一　基準建立（觀察期）</a:t>
-            </a:r>
-            <a:endParaRPr lang="en-US" sz="1300" dirty="0"/>
-          </a:p>
-        </p:txBody>
-      </p:sp>
-      <p:sp>
-        <p:nvSpPr>
-          <p:cNvPr id="7" name="Shape 5"/>
-          <p:cNvSpPr/>
-          <p:nvPr/>
-        </p:nvSpPr>
-        <p:spPr>
-          <a:xfrm>
-            <a:off x="502920" y="1691640"/>
-            <a:ext cx="201168" cy="201168"/>
-          </a:xfrm>
-          <a:prstGeom prst="ellipse">
-            <a:avLst/>
-          </a:prstGeom>
-          <a:solidFill>
-            <a:srgbClr val="1B4F72"/>
-          </a:solidFill>
-          <a:ln/>
-        </p:spPr>
-      </p:sp>
-      <p:sp>
-        <p:nvSpPr>
-          <p:cNvPr id="8" name="Text 6"/>
-          <p:cNvSpPr/>
-          <p:nvPr/>
-        </p:nvSpPr>
-        <p:spPr>
-          <a:xfrm>
-            <a:off x="822960" y="1664208"/>
-            <a:ext cx="3474720" cy="347472"/>
-          </a:xfrm>
-          <a:prstGeom prst="rect">
-            <a:avLst/>
-          </a:prstGeom>
-          <a:noFill/>
-          <a:ln/>
-        </p:spPr>
-        <p:txBody>
-          <a:bodyPr wrap="square" rtlCol="0" anchor="ctr"/>
-          <a:lstStyle/>
-          <a:p>
-            <a:pPr marL="0" indent="0">
-              <a:buNone/>
-            </a:pPr>
-            <a:r>
-              <a:rPr lang="en-US" sz="1200" dirty="0">
-                <a:solidFill>
-                  <a:srgbClr val="0D1B2A"/>
-                </a:solidFill>
-                <a:latin typeface="Calibri" pitchFamily="34" charset="0"/>
-                <a:ea typeface="Calibri" pitchFamily="34" charset="-122"/>
-                <a:cs typeface="Calibri" pitchFamily="34" charset="-120"/>
-              </a:rPr>
-              <a:t>部署系統於辦公 / 家庭環境</a:t>
-            </a:r>
-            <a:endParaRPr lang="en-US" sz="1200" dirty="0"/>
-          </a:p>
-        </p:txBody>
-      </p:sp>
-      <p:sp>
-        <p:nvSpPr>
-          <p:cNvPr id="9" name="Shape 7"/>
-          <p:cNvSpPr/>
-          <p:nvPr/>
-        </p:nvSpPr>
-        <p:spPr>
-          <a:xfrm>
-            <a:off x="502920" y="2148840"/>
-            <a:ext cx="201168" cy="201168"/>
-          </a:xfrm>
-          <a:prstGeom prst="ellipse">
-            <a:avLst/>
-          </a:prstGeom>
-          <a:solidFill>
-            <a:srgbClr val="1B4F72"/>
-          </a:solidFill>
-          <a:ln/>
-        </p:spPr>
-      </p:sp>
-      <p:sp>
-        <p:nvSpPr>
-          <p:cNvPr id="10" name="Text 8"/>
-          <p:cNvSpPr/>
-          <p:nvPr/>
-        </p:nvSpPr>
-        <p:spPr>
-          <a:xfrm>
-            <a:off x="822960" y="2121408"/>
-            <a:ext cx="3474720" cy="347472"/>
-          </a:xfrm>
-          <a:prstGeom prst="rect">
-            <a:avLst/>
-          </a:prstGeom>
-          <a:noFill/>
-          <a:ln/>
-        </p:spPr>
-        <p:txBody>
-          <a:bodyPr wrap="square" rtlCol="0" anchor="ctr"/>
-          <a:lstStyle/>
-          <a:p>
-            <a:pPr marL="0" indent="0">
-              <a:buNone/>
-            </a:pPr>
-            <a:r>
-              <a:rPr lang="en-US" sz="1200" dirty="0">
-                <a:solidFill>
-                  <a:srgbClr val="0D1B2A"/>
-                </a:solidFill>
-                <a:latin typeface="Calibri" pitchFamily="34" charset="0"/>
-                <a:ea typeface="Calibri" pitchFamily="34" charset="-122"/>
-                <a:cs typeface="Calibri" pitchFamily="34" charset="-120"/>
-              </a:rPr>
-              <a:t>無干預地收集電流數據</a:t>
-            </a:r>
-            <a:endParaRPr lang="en-US" sz="1200" dirty="0"/>
-          </a:p>
-        </p:txBody>
-      </p:sp>
-      <p:sp>
-        <p:nvSpPr>
-          <p:cNvPr id="11" name="Shape 9"/>
-          <p:cNvSpPr/>
-          <p:nvPr/>
-        </p:nvSpPr>
-        <p:spPr>
-          <a:xfrm>
-            <a:off x="502920" y="2606040"/>
-            <a:ext cx="201168" cy="201168"/>
-          </a:xfrm>
-          <a:prstGeom prst="ellipse">
-            <a:avLst/>
-          </a:prstGeom>
-          <a:solidFill>
-            <a:srgbClr val="1B4F72"/>
-          </a:solidFill>
-          <a:ln/>
-        </p:spPr>
-      </p:sp>
-      <p:sp>
-        <p:nvSpPr>
-          <p:cNvPr id="12" name="Text 10"/>
-          <p:cNvSpPr/>
-          <p:nvPr/>
-        </p:nvSpPr>
-        <p:spPr>
-          <a:xfrm>
-            <a:off x="822960" y="2578608"/>
-            <a:ext cx="3474720" cy="347472"/>
-          </a:xfrm>
-          <a:prstGeom prst="rect">
-            <a:avLst/>
-          </a:prstGeom>
-          <a:noFill/>
-          <a:ln/>
-        </p:spPr>
-        <p:txBody>
-          <a:bodyPr wrap="square" rtlCol="0" anchor="ctr"/>
-          <a:lstStyle/>
-          <a:p>
-            <a:pPr marL="0" indent="0">
-              <a:buNone/>
-            </a:pPr>
-            <a:r>
-              <a:rPr lang="en-US" sz="1200" dirty="0">
-                <a:solidFill>
-                  <a:srgbClr val="0D1B2A"/>
-                </a:solidFill>
-                <a:latin typeface="Calibri" pitchFamily="34" charset="0"/>
-                <a:ea typeface="Calibri" pitchFamily="34" charset="-122"/>
-                <a:cs typeface="Calibri" pitchFamily="34" charset="-120"/>
-              </a:rPr>
-              <a:t>建立空間「基準耗電模型」</a:t>
-            </a:r>
-            <a:endParaRPr lang="en-US" sz="1200" dirty="0"/>
-          </a:p>
-        </p:txBody>
-      </p:sp>
-      <p:sp>
-        <p:nvSpPr>
-          <p:cNvPr id="13" name="Shape 11"/>
-          <p:cNvSpPr/>
-          <p:nvPr/>
-        </p:nvSpPr>
-        <p:spPr>
-          <a:xfrm>
-            <a:off x="502920" y="3063240"/>
-            <a:ext cx="201168" cy="201168"/>
-          </a:xfrm>
-          <a:prstGeom prst="ellipse">
-            <a:avLst/>
-          </a:prstGeom>
-          <a:solidFill>
-            <a:srgbClr val="1B4F72"/>
-          </a:solidFill>
-          <a:ln/>
-        </p:spPr>
-      </p:sp>
-      <p:sp>
-        <p:nvSpPr>
-          <p:cNvPr id="14" name="Text 12"/>
-          <p:cNvSpPr/>
-          <p:nvPr/>
-        </p:nvSpPr>
-        <p:spPr>
-          <a:xfrm>
-            <a:off x="822960" y="3035808"/>
-            <a:ext cx="3474720" cy="347472"/>
-          </a:xfrm>
-          <a:prstGeom prst="rect">
-            <a:avLst/>
-          </a:prstGeom>
-          <a:noFill/>
-          <a:ln/>
-        </p:spPr>
-        <p:txBody>
-          <a:bodyPr wrap="square" rtlCol="0" anchor="ctr"/>
-          <a:lstStyle/>
-          <a:p>
-            <a:pPr marL="0" indent="0">
-              <a:buNone/>
-            </a:pPr>
-            <a:r>
-              <a:rPr lang="en-US" sz="1200" dirty="0">
-                <a:solidFill>
-                  <a:srgbClr val="0D1B2A"/>
-                </a:solidFill>
-                <a:latin typeface="Calibri" pitchFamily="34" charset="0"/>
-                <a:ea typeface="Calibri" pitchFamily="34" charset="-122"/>
-                <a:cs typeface="Calibri" pitchFamily="34" charset="-120"/>
-              </a:rPr>
-              <a:t>確立 Baseline 參考值</a:t>
-            </a:r>
-            <a:endParaRPr lang="en-US" sz="1200" dirty="0"/>
-          </a:p>
-        </p:txBody>
-      </p:sp>
-      <p:sp>
-        <p:nvSpPr>
-          <p:cNvPr id="15" name="Shape 13"/>
-          <p:cNvSpPr/>
-          <p:nvPr/>
-        </p:nvSpPr>
-        <p:spPr>
-          <a:xfrm>
-            <a:off x="4754880" y="1097280"/>
-            <a:ext cx="4114800" cy="2377440"/>
-          </a:xfrm>
-          <a:prstGeom prst="rect">
-            <a:avLst/>
-          </a:prstGeom>
-          <a:solidFill>
-            <a:srgbClr val="F1F5F9"/>
-          </a:solidFill>
-          <a:ln w="12700">
-            <a:solidFill>
-              <a:srgbClr val="10B981"/>
-            </a:solidFill>
-            <a:prstDash val="solid"/>
-          </a:ln>
-        </p:spPr>
-      </p:sp>
-      <p:sp>
-        <p:nvSpPr>
-          <p:cNvPr id="16" name="Shape 14"/>
-          <p:cNvSpPr/>
-          <p:nvPr/>
-        </p:nvSpPr>
-        <p:spPr>
-          <a:xfrm>
-            <a:off x="4754880" y="1097280"/>
-            <a:ext cx="4114800" cy="457200"/>
-          </a:xfrm>
-          <a:prstGeom prst="rect">
-            <a:avLst/>
-          </a:prstGeom>
-          <a:solidFill>
-            <a:srgbClr val="10B981"/>
-          </a:solidFill>
-          <a:ln/>
-        </p:spPr>
-      </p:sp>
-      <p:sp>
-        <p:nvSpPr>
-          <p:cNvPr id="17" name="Text 15"/>
-          <p:cNvSpPr/>
-          <p:nvPr/>
-        </p:nvSpPr>
-        <p:spPr>
-          <a:xfrm>
-            <a:off x="4892040" y="1097280"/>
-            <a:ext cx="3840480" cy="457200"/>
-          </a:xfrm>
-          <a:prstGeom prst="rect">
-            <a:avLst/>
-          </a:prstGeom>
-          <a:noFill/>
-          <a:ln/>
-        </p:spPr>
-        <p:txBody>
-          <a:bodyPr wrap="square" rtlCol="0" anchor="ctr"/>
-          <a:lstStyle/>
-          <a:p>
-            <a:pPr marL="0" indent="0">
-              <a:buNone/>
-            </a:pPr>
-            <a:r>
-              <a:rPr lang="en-US" sz="1300" b="1" dirty="0">
-                <a:solidFill>
-                  <a:srgbClr val="FFFFFF"/>
-                </a:solidFill>
-                <a:latin typeface="Calibri" pitchFamily="34" charset="0"/>
-                <a:ea typeface="Calibri" pitchFamily="34" charset="-122"/>
-                <a:cs typeface="Calibri" pitchFamily="34" charset="-120"/>
-              </a:rPr>
-              <a:t>階段二　介入改善（優化期）</a:t>
-            </a:r>
-            <a:endParaRPr lang="en-US" sz="1300" dirty="0"/>
-          </a:p>
-        </p:txBody>
-      </p:sp>
-      <p:sp>
-        <p:nvSpPr>
-          <p:cNvPr id="18" name="Shape 16"/>
-          <p:cNvSpPr/>
-          <p:nvPr/>
-        </p:nvSpPr>
-        <p:spPr>
-          <a:xfrm>
-            <a:off x="4937760" y="1691640"/>
-            <a:ext cx="201168" cy="201168"/>
-          </a:xfrm>
-          <a:prstGeom prst="ellipse">
-            <a:avLst/>
-          </a:prstGeom>
-          <a:solidFill>
-            <a:srgbClr val="10B981"/>
-          </a:solidFill>
-          <a:ln/>
-        </p:spPr>
-      </p:sp>
-      <p:sp>
-        <p:nvSpPr>
-          <p:cNvPr id="19" name="Text 17"/>
-          <p:cNvSpPr/>
-          <p:nvPr/>
-        </p:nvSpPr>
-        <p:spPr>
-          <a:xfrm>
-            <a:off x="5257800" y="1664208"/>
-            <a:ext cx="3474720" cy="347472"/>
-          </a:xfrm>
-          <a:prstGeom prst="rect">
-            <a:avLst/>
-          </a:prstGeom>
-          <a:noFill/>
-          <a:ln/>
-        </p:spPr>
-        <p:txBody>
-          <a:bodyPr wrap="square" rtlCol="0" anchor="ctr"/>
-          <a:lstStyle/>
-          <a:p>
-            <a:pPr marL="0" indent="0">
-              <a:buNone/>
-            </a:pPr>
-            <a:r>
-              <a:rPr lang="en-US" sz="1200" dirty="0">
-                <a:solidFill>
-                  <a:srgbClr val="0D1B2A"/>
-                </a:solidFill>
-                <a:latin typeface="Calibri" pitchFamily="34" charset="0"/>
-                <a:ea typeface="Calibri" pitchFamily="34" charset="-122"/>
-                <a:cs typeface="Calibri" pitchFamily="34" charset="-120"/>
-              </a:rPr>
-              <a:t>根據數據進行用電洞察</a:t>
-            </a:r>
-            <a:endParaRPr lang="en-US" sz="1200" dirty="0"/>
-          </a:p>
-        </p:txBody>
-      </p:sp>
-      <p:sp>
-        <p:nvSpPr>
-          <p:cNvPr id="20" name="Shape 18"/>
-          <p:cNvSpPr/>
-          <p:nvPr/>
-        </p:nvSpPr>
-        <p:spPr>
-          <a:xfrm>
-            <a:off x="4937760" y="2148840"/>
-            <a:ext cx="201168" cy="201168"/>
-          </a:xfrm>
-          <a:prstGeom prst="ellipse">
-            <a:avLst/>
-          </a:prstGeom>
-          <a:solidFill>
-            <a:srgbClr val="10B981"/>
-          </a:solidFill>
-          <a:ln/>
-        </p:spPr>
-      </p:sp>
-      <p:sp>
-        <p:nvSpPr>
-          <p:cNvPr id="21" name="Text 19"/>
-          <p:cNvSpPr/>
-          <p:nvPr/>
-        </p:nvSpPr>
-        <p:spPr>
-          <a:xfrm>
-            <a:off x="5257800" y="2121408"/>
-            <a:ext cx="3474720" cy="347472"/>
-          </a:xfrm>
-          <a:prstGeom prst="rect">
-            <a:avLst/>
-          </a:prstGeom>
-          <a:noFill/>
-          <a:ln/>
-        </p:spPr>
-        <p:txBody>
-          <a:bodyPr wrap="square" rtlCol="0" anchor="ctr"/>
-          <a:lstStyle/>
-          <a:p>
-            <a:pPr marL="0" indent="0">
-              <a:buNone/>
-            </a:pPr>
-            <a:r>
-              <a:rPr lang="en-US" sz="1200" dirty="0">
-                <a:solidFill>
-                  <a:srgbClr val="0D1B2A"/>
-                </a:solidFill>
-                <a:latin typeface="Calibri" pitchFamily="34" charset="0"/>
-                <a:ea typeface="Calibri" pitchFamily="34" charset="-122"/>
-                <a:cs typeface="Calibri" pitchFamily="34" charset="-120"/>
-              </a:rPr>
-              <a:t>非上班時段繼電器切斷待機設備</a:t>
-            </a:r>
-            <a:endParaRPr lang="en-US" sz="1200" dirty="0"/>
-          </a:p>
-        </p:txBody>
-      </p:sp>
-      <p:sp>
-        <p:nvSpPr>
-          <p:cNvPr id="22" name="Shape 20"/>
-          <p:cNvSpPr/>
-          <p:nvPr/>
-        </p:nvSpPr>
-        <p:spPr>
-          <a:xfrm>
-            <a:off x="4937760" y="2606040"/>
-            <a:ext cx="201168" cy="201168"/>
-          </a:xfrm>
-          <a:prstGeom prst="ellipse">
-            <a:avLst/>
-          </a:prstGeom>
-          <a:solidFill>
-            <a:srgbClr val="10B981"/>
-          </a:solidFill>
-          <a:ln/>
-        </p:spPr>
-      </p:sp>
-      <p:sp>
-        <p:nvSpPr>
-          <p:cNvPr id="23" name="Text 21"/>
-          <p:cNvSpPr/>
-          <p:nvPr/>
-        </p:nvSpPr>
-        <p:spPr>
-          <a:xfrm>
-            <a:off x="5257800" y="2578608"/>
-            <a:ext cx="3474720" cy="347472"/>
-          </a:xfrm>
-          <a:prstGeom prst="rect">
-            <a:avLst/>
-          </a:prstGeom>
-          <a:noFill/>
-          <a:ln/>
-        </p:spPr>
-        <p:txBody>
-          <a:bodyPr wrap="square" rtlCol="0" anchor="ctr"/>
-          <a:lstStyle/>
-          <a:p>
-            <a:pPr marL="0" indent="0">
-              <a:buNone/>
-            </a:pPr>
-            <a:r>
-              <a:rPr lang="en-US" sz="1200" dirty="0">
-                <a:solidFill>
-                  <a:srgbClr val="0D1B2A"/>
-                </a:solidFill>
-                <a:latin typeface="Calibri" pitchFamily="34" charset="0"/>
-                <a:ea typeface="Calibri" pitchFamily="34" charset="-122"/>
-                <a:cs typeface="Calibri" pitchFamily="34" charset="-120"/>
-              </a:rPr>
-              <a:t>實驗結束對比前後兩週用電量</a:t>
-            </a:r>
-            <a:endParaRPr lang="en-US" sz="1200" dirty="0"/>
-          </a:p>
-        </p:txBody>
-      </p:sp>
-      <p:sp>
-        <p:nvSpPr>
-          <p:cNvPr id="24" name="Shape 22"/>
-          <p:cNvSpPr/>
-          <p:nvPr/>
-        </p:nvSpPr>
-        <p:spPr>
-          <a:xfrm>
-            <a:off x="4937760" y="3063240"/>
-            <a:ext cx="201168" cy="201168"/>
-          </a:xfrm>
-          <a:prstGeom prst="ellipse">
-            <a:avLst/>
-          </a:prstGeom>
-          <a:solidFill>
-            <a:srgbClr val="10B981"/>
-          </a:solidFill>
-          <a:ln/>
-        </p:spPr>
-      </p:sp>
-      <p:sp>
-        <p:nvSpPr>
-          <p:cNvPr id="25" name="Text 23"/>
-          <p:cNvSpPr/>
-          <p:nvPr/>
-        </p:nvSpPr>
-        <p:spPr>
-          <a:xfrm>
-            <a:off x="5257800" y="3035808"/>
-            <a:ext cx="3474720" cy="347472"/>
-          </a:xfrm>
-          <a:prstGeom prst="rect">
-            <a:avLst/>
-          </a:prstGeom>
-          <a:noFill/>
-          <a:ln/>
-        </p:spPr>
-        <p:txBody>
-          <a:bodyPr wrap="square" rtlCol="0" anchor="ctr"/>
-          <a:lstStyle/>
-          <a:p>
-            <a:pPr marL="0" indent="0">
-              <a:buNone/>
-            </a:pPr>
-            <a:r>
-              <a:rPr lang="en-US" sz="1200" dirty="0">
-                <a:solidFill>
-                  <a:srgbClr val="0D1B2A"/>
-                </a:solidFill>
-                <a:latin typeface="Calibri" pitchFamily="34" charset="0"/>
-                <a:ea typeface="Calibri" pitchFamily="34" charset="-122"/>
-                <a:cs typeface="Calibri" pitchFamily="34" charset="-120"/>
-              </a:rPr>
-              <a:t>計算節電率與成效評估</a:t>
-            </a:r>
-            <a:endParaRPr lang="en-US" sz="1200" dirty="0"/>
-          </a:p>
-        </p:txBody>
-      </p:sp>
-      <p:sp>
-        <p:nvSpPr>
-          <p:cNvPr id="26" name="Text 24"/>
-          <p:cNvSpPr/>
-          <p:nvPr/>
-        </p:nvSpPr>
-        <p:spPr>
-          <a:xfrm>
-            <a:off x="320040" y="3611880"/>
-            <a:ext cx="8503920" cy="365760"/>
-          </a:xfrm>
-          <a:prstGeom prst="rect">
-            <a:avLst/>
-          </a:prstGeom>
-          <a:noFill/>
-          <a:ln/>
-        </p:spPr>
-        <p:txBody>
-          <a:bodyPr wrap="square" rtlCol="0" anchor="ctr"/>
-          <a:lstStyle/>
-          <a:p>
-            <a:pPr marL="0" indent="0">
-              <a:buNone/>
-            </a:pPr>
-            <a:r>
-              <a:rPr lang="en-US" sz="1400" b="1" dirty="0">
-                <a:solidFill>
-                  <a:srgbClr val="0D1B2A"/>
-                </a:solidFill>
-                <a:latin typeface="Calibri" pitchFamily="34" charset="0"/>
-                <a:ea typeface="Calibri" pitchFamily="34" charset="-122"/>
-                <a:cs typeface="Calibri" pitchFamily="34" charset="-120"/>
-              </a:rPr>
-              <a:t>精度驗證目標（vs. 數位萬用表）</a:t>
-            </a:r>
-            <a:endParaRPr lang="en-US" sz="1400" dirty="0"/>
-          </a:p>
-        </p:txBody>
-      </p:sp>
-      <p:graphicFrame>
-        <p:nvGraphicFramePr>
-          <p:cNvPr id="27" name="Chart 0"/>
-          <p:cNvGraphicFramePr/>
-          <p:nvPr/>
-        </p:nvGraphicFramePr>
-        <p:xfrm>
-          <a:off x="320040" y="3977640"/>
-          <a:ext cx="8503920" cy="1005840"/>
-        </p:xfrm>
-        <a:graphic>
-          <a:graphicData uri="http://schemas.openxmlformats.org/drawingml/2006/chart">
-            <c:chart xmlns:c="http://schemas.openxmlformats.org/drawingml/2006/chart" xmlns:r="http://schemas.openxmlformats.org/officeDocument/2006/relationships" r:id="rId3"/>
-          </a:graphicData>
-        </a:graphic>
-      </p:graphicFrame>
-    </p:spTree>
   </p:cSld>
   <p:clrMapOvr>
     <a:masterClrMapping/>
